--- a/Documentazione/Gestione delle fee.pptx
+++ b/Documentazione/Gestione delle fee.pptx
@@ -144,7 +144,7 @@
       </p:grpSpPr>
       <p:sp>
         <p:nvSpPr>
-          <p:cNvPr id="583613683" name="Header Placeholder 1"/>
+          <p:cNvPr id="686372268" name="Header Placeholder 1"/>
           <p:cNvSpPr>
             <a:spLocks noGrp="1"/>
           </p:cNvSpPr>
@@ -178,7 +178,7 @@
       </p:sp>
       <p:sp>
         <p:nvSpPr>
-          <p:cNvPr id="1775771143" name="Date Placeholder 2"/>
+          <p:cNvPr id="1951050847" name="Date Placeholder 2"/>
           <p:cNvSpPr>
             <a:spLocks noGrp="1"/>
           </p:cNvSpPr>
@@ -216,7 +216,7 @@
       </p:sp>
       <p:sp>
         <p:nvSpPr>
-          <p:cNvPr id="361404208" name="Slide Image Placeholder 3"/>
+          <p:cNvPr id="475053476" name="Slide Image Placeholder 3"/>
           <p:cNvSpPr>
             <a:spLocks noChangeAspect="1" noGrp="1" noRot="1"/>
           </p:cNvSpPr>
@@ -252,7 +252,7 @@
       </p:sp>
       <p:sp>
         <p:nvSpPr>
-          <p:cNvPr id="474605692" name="Notes Placeholder 4"/>
+          <p:cNvPr id="850065221" name="Notes Placeholder 4"/>
           <p:cNvSpPr>
             <a:spLocks noGrp="1"/>
           </p:cNvSpPr>
@@ -326,7 +326,7 @@
       </p:sp>
       <p:sp>
         <p:nvSpPr>
-          <p:cNvPr id="1090186672" name="Footer Placeholder 5"/>
+          <p:cNvPr id="1005647765" name="Footer Placeholder 5"/>
           <p:cNvSpPr>
             <a:spLocks noGrp="1"/>
           </p:cNvSpPr>
@@ -360,7 +360,7 @@
       </p:sp>
       <p:sp>
         <p:nvSpPr>
-          <p:cNvPr id="1925913441" name="Slide Number Placeholder 6"/>
+          <p:cNvPr id="341340722" name="Slide Number Placeholder 6"/>
           <p:cNvSpPr>
             <a:spLocks noGrp="1"/>
           </p:cNvSpPr>
@@ -513,7 +513,7 @@
       </p:grpSpPr>
       <p:sp>
         <p:nvSpPr>
-          <p:cNvPr id="1489929207" name="Slide Image Placeholder 1"/>
+          <p:cNvPr id="651881179" name="Slide Image Placeholder 1"/>
           <p:cNvSpPr>
             <a:spLocks noChangeAspect="1" noGrp="1" noRot="1"/>
           </p:cNvSpPr>
@@ -525,7 +525,7 @@
       </p:sp>
       <p:sp>
         <p:nvSpPr>
-          <p:cNvPr id="387119562" name="Notes Placeholder 2"/>
+          <p:cNvPr id="1876890747" name="Notes Placeholder 2"/>
           <p:cNvSpPr>
             <a:spLocks noGrp="1"/>
           </p:cNvSpPr>
@@ -547,7 +547,7 @@
       </p:sp>
       <p:sp>
         <p:nvSpPr>
-          <p:cNvPr id="659976601" name="Slide Number Placeholder 3"/>
+          <p:cNvPr id="1929216184" name="Slide Number Placeholder 3"/>
           <p:cNvSpPr>
             <a:spLocks noGrp="1"/>
           </p:cNvSpPr>
@@ -598,7 +598,7 @@
       </p:grpSpPr>
       <p:sp>
         <p:nvSpPr>
-          <p:cNvPr id="1498161177" name="Slide Image Placeholder 1"/>
+          <p:cNvPr id="353036661" name="Slide Image Placeholder 1"/>
           <p:cNvSpPr>
             <a:spLocks noChangeAspect="1" noGrp="1" noRot="1"/>
           </p:cNvSpPr>
@@ -610,7 +610,7 @@
       </p:sp>
       <p:sp>
         <p:nvSpPr>
-          <p:cNvPr id="727973578" name="Notes Placeholder 2"/>
+          <p:cNvPr id="1403395800" name="Notes Placeholder 2"/>
           <p:cNvSpPr>
             <a:spLocks noGrp="1"/>
           </p:cNvSpPr>
@@ -632,7 +632,7 @@
       </p:sp>
       <p:sp>
         <p:nvSpPr>
-          <p:cNvPr id="1133693562" name="Slide Number Placeholder 3"/>
+          <p:cNvPr id="1453951319" name="Slide Number Placeholder 3"/>
           <p:cNvSpPr>
             <a:spLocks noGrp="1"/>
           </p:cNvSpPr>
@@ -683,7 +683,7 @@
       </p:grpSpPr>
       <p:sp>
         <p:nvSpPr>
-          <p:cNvPr id="1151435277" name="Slide Image Placeholder 1"/>
+          <p:cNvPr id="696506058" name="Slide Image Placeholder 1"/>
           <p:cNvSpPr>
             <a:spLocks noChangeAspect="1" noGrp="1" noRot="1"/>
           </p:cNvSpPr>
@@ -695,7 +695,7 @@
       </p:sp>
       <p:sp>
         <p:nvSpPr>
-          <p:cNvPr id="614598267" name="Notes Placeholder 2"/>
+          <p:cNvPr id="891818959" name="Notes Placeholder 2"/>
           <p:cNvSpPr>
             <a:spLocks noGrp="1"/>
           </p:cNvSpPr>
@@ -717,7 +717,7 @@
       </p:sp>
       <p:sp>
         <p:nvSpPr>
-          <p:cNvPr id="308442407" name="Slide Number Placeholder 3"/>
+          <p:cNvPr id="862016513" name="Slide Number Placeholder 3"/>
           <p:cNvSpPr>
             <a:spLocks noGrp="1"/>
           </p:cNvSpPr>
@@ -768,7 +768,7 @@
       </p:grpSpPr>
       <p:sp>
         <p:nvSpPr>
-          <p:cNvPr id="1255740217" name="Slide Image Placeholder 1"/>
+          <p:cNvPr id="629465915" name="Slide Image Placeholder 1"/>
           <p:cNvSpPr>
             <a:spLocks noChangeAspect="1" noGrp="1" noRot="1"/>
           </p:cNvSpPr>
@@ -780,7 +780,7 @@
       </p:sp>
       <p:sp>
         <p:nvSpPr>
-          <p:cNvPr id="635466105" name="Notes Placeholder 2"/>
+          <p:cNvPr id="395517363" name="Notes Placeholder 2"/>
           <p:cNvSpPr>
             <a:spLocks noGrp="1"/>
           </p:cNvSpPr>
@@ -802,7 +802,7 @@
       </p:sp>
       <p:sp>
         <p:nvSpPr>
-          <p:cNvPr id="1311152640" name="Slide Number Placeholder 3"/>
+          <p:cNvPr id="2016120103" name="Slide Number Placeholder 3"/>
           <p:cNvSpPr>
             <a:spLocks noGrp="1"/>
           </p:cNvSpPr>
@@ -853,7 +853,7 @@
       </p:grpSpPr>
       <p:sp>
         <p:nvSpPr>
-          <p:cNvPr id="1211927464" name="Slide Image Placeholder 1"/>
+          <p:cNvPr id="1049399034" name="Slide Image Placeholder 1"/>
           <p:cNvSpPr>
             <a:spLocks noChangeAspect="1" noGrp="1" noRot="1"/>
           </p:cNvSpPr>
@@ -865,7 +865,7 @@
       </p:sp>
       <p:sp>
         <p:nvSpPr>
-          <p:cNvPr id="1980487878" name="Notes Placeholder 2"/>
+          <p:cNvPr id="1325944461" name="Notes Placeholder 2"/>
           <p:cNvSpPr>
             <a:spLocks noGrp="1"/>
           </p:cNvSpPr>
@@ -887,7 +887,7 @@
       </p:sp>
       <p:sp>
         <p:nvSpPr>
-          <p:cNvPr id="24539147" name="Slide Number Placeholder 3"/>
+          <p:cNvPr id="1951162000" name="Slide Number Placeholder 3"/>
           <p:cNvSpPr>
             <a:spLocks noGrp="1"/>
           </p:cNvSpPr>
@@ -938,7 +938,7 @@
       </p:grpSpPr>
       <p:sp>
         <p:nvSpPr>
-          <p:cNvPr id="446485300" name="Slide Image Placeholder 1"/>
+          <p:cNvPr id="120895684" name="Slide Image Placeholder 1"/>
           <p:cNvSpPr>
             <a:spLocks noChangeAspect="1" noGrp="1" noRot="1"/>
           </p:cNvSpPr>
@@ -950,7 +950,7 @@
       </p:sp>
       <p:sp>
         <p:nvSpPr>
-          <p:cNvPr id="349308769" name="Notes Placeholder 2"/>
+          <p:cNvPr id="1118052031" name="Notes Placeholder 2"/>
           <p:cNvSpPr>
             <a:spLocks noGrp="1"/>
           </p:cNvSpPr>
@@ -972,7 +972,7 @@
       </p:sp>
       <p:sp>
         <p:nvSpPr>
-          <p:cNvPr id="864415317" name="Slide Number Placeholder 3"/>
+          <p:cNvPr id="45648253" name="Slide Number Placeholder 3"/>
           <p:cNvSpPr>
             <a:spLocks noGrp="1"/>
           </p:cNvSpPr>
@@ -1023,7 +1023,7 @@
       </p:grpSpPr>
       <p:sp>
         <p:nvSpPr>
-          <p:cNvPr id="629148474" name="Slide Image Placeholder 1"/>
+          <p:cNvPr id="791757382" name="Slide Image Placeholder 1"/>
           <p:cNvSpPr>
             <a:spLocks noChangeAspect="1" noGrp="1" noRot="1"/>
           </p:cNvSpPr>
@@ -1035,7 +1035,7 @@
       </p:sp>
       <p:sp>
         <p:nvSpPr>
-          <p:cNvPr id="1797743278" name="Notes Placeholder 2"/>
+          <p:cNvPr id="1663070032" name="Notes Placeholder 2"/>
           <p:cNvSpPr>
             <a:spLocks noGrp="1"/>
           </p:cNvSpPr>
@@ -1057,7 +1057,7 @@
       </p:sp>
       <p:sp>
         <p:nvSpPr>
-          <p:cNvPr id="389395222" name="Slide Number Placeholder 3"/>
+          <p:cNvPr id="135596886" name="Slide Number Placeholder 3"/>
           <p:cNvSpPr>
             <a:spLocks noGrp="1"/>
           </p:cNvSpPr>
@@ -1108,7 +1108,7 @@
       </p:grpSpPr>
       <p:sp>
         <p:nvSpPr>
-          <p:cNvPr id="1004963651" name="Slide Image Placeholder 1"/>
+          <p:cNvPr id="1099109069" name="Slide Image Placeholder 1"/>
           <p:cNvSpPr>
             <a:spLocks noChangeAspect="1" noGrp="1" noRot="1"/>
           </p:cNvSpPr>
@@ -1120,7 +1120,7 @@
       </p:sp>
       <p:sp>
         <p:nvSpPr>
-          <p:cNvPr id="1576933762" name="Notes Placeholder 2"/>
+          <p:cNvPr id="2035724354" name="Notes Placeholder 2"/>
           <p:cNvSpPr>
             <a:spLocks noGrp="1"/>
           </p:cNvSpPr>
@@ -1142,7 +1142,7 @@
       </p:sp>
       <p:sp>
         <p:nvSpPr>
-          <p:cNvPr id="1997384688" name="Slide Number Placeholder 3"/>
+          <p:cNvPr id="1208382893" name="Slide Number Placeholder 3"/>
           <p:cNvSpPr>
             <a:spLocks noGrp="1"/>
           </p:cNvSpPr>
@@ -1193,7 +1193,7 @@
       </p:grpSpPr>
       <p:sp>
         <p:nvSpPr>
-          <p:cNvPr id="2054206587" name="Slide Image Placeholder 1"/>
+          <p:cNvPr id="17704489" name="Slide Image Placeholder 1"/>
           <p:cNvSpPr>
             <a:spLocks noChangeAspect="1" noGrp="1" noRot="1"/>
           </p:cNvSpPr>
@@ -1205,7 +1205,7 @@
       </p:sp>
       <p:sp>
         <p:nvSpPr>
-          <p:cNvPr id="1316164998" name="Notes Placeholder 2"/>
+          <p:cNvPr id="75234460" name="Notes Placeholder 2"/>
           <p:cNvSpPr>
             <a:spLocks noGrp="1"/>
           </p:cNvSpPr>
@@ -1227,7 +1227,7 @@
       </p:sp>
       <p:sp>
         <p:nvSpPr>
-          <p:cNvPr id="1544080682" name="Slide Number Placeholder 3"/>
+          <p:cNvPr id="1587687354" name="Slide Number Placeholder 3"/>
           <p:cNvSpPr>
             <a:spLocks noGrp="1"/>
           </p:cNvSpPr>
@@ -1278,7 +1278,7 @@
       </p:grpSpPr>
       <p:sp>
         <p:nvSpPr>
-          <p:cNvPr id="818882875" name="Slide Image Placeholder 1"/>
+          <p:cNvPr id="1472975229" name="Slide Image Placeholder 1"/>
           <p:cNvSpPr>
             <a:spLocks noChangeAspect="1" noGrp="1" noRot="1"/>
           </p:cNvSpPr>
@@ -1290,7 +1290,7 @@
       </p:sp>
       <p:sp>
         <p:nvSpPr>
-          <p:cNvPr id="1801109731" name="Notes Placeholder 2"/>
+          <p:cNvPr id="817124457" name="Notes Placeholder 2"/>
           <p:cNvSpPr>
             <a:spLocks noGrp="1"/>
           </p:cNvSpPr>
@@ -1312,7 +1312,7 @@
       </p:sp>
       <p:sp>
         <p:nvSpPr>
-          <p:cNvPr id="1859963997" name="Slide Number Placeholder 3"/>
+          <p:cNvPr id="198112672" name="Slide Number Placeholder 3"/>
           <p:cNvSpPr>
             <a:spLocks noGrp="1"/>
           </p:cNvSpPr>
@@ -1363,7 +1363,7 @@
       </p:grpSpPr>
       <p:sp>
         <p:nvSpPr>
-          <p:cNvPr id="183475154" name="Slide Image Placeholder 1"/>
+          <p:cNvPr id="693735453" name="Slide Image Placeholder 1"/>
           <p:cNvSpPr>
             <a:spLocks noChangeAspect="1" noGrp="1" noRot="1"/>
           </p:cNvSpPr>
@@ -1375,7 +1375,7 @@
       </p:sp>
       <p:sp>
         <p:nvSpPr>
-          <p:cNvPr id="1945251788" name="Notes Placeholder 2"/>
+          <p:cNvPr id="80478449" name="Notes Placeholder 2"/>
           <p:cNvSpPr>
             <a:spLocks noGrp="1"/>
           </p:cNvSpPr>
@@ -1397,7 +1397,7 @@
       </p:sp>
       <p:sp>
         <p:nvSpPr>
-          <p:cNvPr id="1877682367" name="Slide Number Placeholder 3"/>
+          <p:cNvPr id="722168099" name="Slide Number Placeholder 3"/>
           <p:cNvSpPr>
             <a:spLocks noGrp="1"/>
           </p:cNvSpPr>
@@ -1448,7 +1448,7 @@
       </p:grpSpPr>
       <p:sp>
         <p:nvSpPr>
-          <p:cNvPr id="1703088226" name="Slide Image Placeholder 1"/>
+          <p:cNvPr id="719132900" name="Slide Image Placeholder 1"/>
           <p:cNvSpPr>
             <a:spLocks noChangeAspect="1" noGrp="1" noRot="1"/>
           </p:cNvSpPr>
@@ -1460,7 +1460,7 @@
       </p:sp>
       <p:sp>
         <p:nvSpPr>
-          <p:cNvPr id="1294088549" name="Notes Placeholder 2"/>
+          <p:cNvPr id="1786937034" name="Notes Placeholder 2"/>
           <p:cNvSpPr>
             <a:spLocks noGrp="1"/>
           </p:cNvSpPr>
@@ -1482,7 +1482,7 @@
       </p:sp>
       <p:sp>
         <p:nvSpPr>
-          <p:cNvPr id="1531274542" name="Slide Number Placeholder 3"/>
+          <p:cNvPr id="1683585698" name="Slide Number Placeholder 3"/>
           <p:cNvSpPr>
             <a:spLocks noGrp="1"/>
           </p:cNvSpPr>
@@ -1533,7 +1533,7 @@
       </p:grpSpPr>
       <p:sp>
         <p:nvSpPr>
-          <p:cNvPr id="1910604084" name="Slide Image Placeholder 1"/>
+          <p:cNvPr id="233044781" name="Slide Image Placeholder 1"/>
           <p:cNvSpPr>
             <a:spLocks noChangeAspect="1" noGrp="1" noRot="1"/>
           </p:cNvSpPr>
@@ -1545,7 +1545,7 @@
       </p:sp>
       <p:sp>
         <p:nvSpPr>
-          <p:cNvPr id="32907126" name="Notes Placeholder 2"/>
+          <p:cNvPr id="915362952" name="Notes Placeholder 2"/>
           <p:cNvSpPr>
             <a:spLocks noGrp="1"/>
           </p:cNvSpPr>
@@ -1567,7 +1567,7 @@
       </p:sp>
       <p:sp>
         <p:nvSpPr>
-          <p:cNvPr id="1992546169" name="Slide Number Placeholder 3"/>
+          <p:cNvPr id="24413795" name="Slide Number Placeholder 3"/>
           <p:cNvSpPr>
             <a:spLocks noGrp="1"/>
           </p:cNvSpPr>
@@ -1618,7 +1618,7 @@
       </p:grpSpPr>
       <p:sp>
         <p:nvSpPr>
-          <p:cNvPr id="283250868" name="Slide Image Placeholder 1"/>
+          <p:cNvPr id="2137876218" name="Slide Image Placeholder 1"/>
           <p:cNvSpPr>
             <a:spLocks noChangeAspect="1" noGrp="1" noRot="1"/>
           </p:cNvSpPr>
@@ -1630,7 +1630,7 @@
       </p:sp>
       <p:sp>
         <p:nvSpPr>
-          <p:cNvPr id="379469915" name="Notes Placeholder 2"/>
+          <p:cNvPr id="1064279161" name="Notes Placeholder 2"/>
           <p:cNvSpPr>
             <a:spLocks noGrp="1"/>
           </p:cNvSpPr>
@@ -1652,7 +1652,7 @@
       </p:sp>
       <p:sp>
         <p:nvSpPr>
-          <p:cNvPr id="342215411" name="Slide Number Placeholder 3"/>
+          <p:cNvPr id="574387495" name="Slide Number Placeholder 3"/>
           <p:cNvSpPr>
             <a:spLocks noGrp="1"/>
           </p:cNvSpPr>
@@ -2017,7 +2017,7 @@
       </p:grpSpPr>
       <p:sp>
         <p:nvSpPr>
-          <p:cNvPr id="1241245089" name="Text 0"/>
+          <p:cNvPr id="1956623371" name="Text 0"/>
           <p:cNvSpPr/>
           <p:nvPr/>
         </p:nvSpPr>
@@ -2060,7 +2060,7 @@
       </p:sp>
       <p:sp>
         <p:nvSpPr>
-          <p:cNvPr id="724885040" name="Text 1"/>
+          <p:cNvPr id="1994528870" name="Text 1"/>
           <p:cNvSpPr/>
           <p:nvPr/>
         </p:nvSpPr>
@@ -2103,7 +2103,7 @@
       </p:sp>
       <p:sp>
         <p:nvSpPr>
-          <p:cNvPr id="1184012982" name="Text 2"/>
+          <p:cNvPr id="1182426010" name="Text 2"/>
           <p:cNvSpPr/>
           <p:nvPr/>
         </p:nvSpPr>
@@ -2186,7 +2186,7 @@
       </p:grpSpPr>
       <p:sp>
         <p:nvSpPr>
-          <p:cNvPr id="688419092" name="Text 0"/>
+          <p:cNvPr id="988229504" name="Text 0"/>
           <p:cNvSpPr/>
           <p:nvPr/>
         </p:nvSpPr>
@@ -2229,7 +2229,7 @@
       </p:sp>
       <p:sp>
         <p:nvSpPr>
-          <p:cNvPr id="1610702928" name="Text 1"/>
+          <p:cNvPr id="1976115325" name="Text 1"/>
           <p:cNvSpPr/>
           <p:nvPr/>
         </p:nvSpPr>
@@ -2437,7 +2437,7 @@
       </p:grpSpPr>
       <p:sp>
         <p:nvSpPr>
-          <p:cNvPr id="530232035" name="Text 0"/>
+          <p:cNvPr id="1472599906" name="Text 0"/>
           <p:cNvSpPr/>
           <p:nvPr/>
         </p:nvSpPr>
@@ -2480,7 +2480,7 @@
       </p:sp>
       <p:sp>
         <p:nvSpPr>
-          <p:cNvPr id="349893597" name="Text 1"/>
+          <p:cNvPr id="365740334" name="Text 1"/>
           <p:cNvSpPr/>
           <p:nvPr/>
         </p:nvSpPr>
@@ -3054,7 +3054,7 @@
       </p:grpSpPr>
       <p:sp>
         <p:nvSpPr>
-          <p:cNvPr id="1670309896" name="Text 0"/>
+          <p:cNvPr id="1942540844" name="Text 0"/>
           <p:cNvSpPr/>
           <p:nvPr/>
         </p:nvSpPr>
@@ -3097,7 +3097,7 @@
       </p:sp>
       <p:sp>
         <p:nvSpPr>
-          <p:cNvPr id="894625116" name="Text 1"/>
+          <p:cNvPr id="1787482091" name="Text 1"/>
           <p:cNvSpPr/>
           <p:nvPr/>
         </p:nvSpPr>
@@ -3205,13 +3205,13 @@
       </p:sp>
       <p:graphicFrame>
         <p:nvGraphicFramePr>
-          <p:cNvPr id="968627584" name=""/>
+          <p:cNvPr id="575238305" name=""/>
           <p:cNvGraphicFramePr>
             <a:graphicFrameLocks xmlns:a="http://schemas.openxmlformats.org/drawingml/2006/main"/>
           </p:cNvGraphicFramePr>
           <p:nvPr/>
         </p:nvGraphicFramePr>
-        <p:xfrm>
+        <p:xfrm rot="0">
           <a:off x="1036333" y="1317977"/>
           <a:ext cx="4867274" cy="3314699"/>
         </p:xfrm>
@@ -3257,16 +3257,16 @@
                     </a:p>
                   </a:txBody>
                   <a:tcPr marL="0" marR="0" marT="0" marB="0" anchor="b">
-                    <a:lnL algn="ctr">
-                      <a:noFill/>
-                    </a:lnL>
-                    <a:lnR algn="ctr">
-                      <a:noFill/>
-                    </a:lnR>
-                    <a:lnT algn="ctr">
-                      <a:noFill/>
-                    </a:lnT>
-                    <a:lnB algn="ctr">
+                    <a:lnL w="12700" algn="ctr">
+                      <a:noFill/>
+                    </a:lnL>
+                    <a:lnR w="12700" algn="ctr">
+                      <a:noFill/>
+                    </a:lnR>
+                    <a:lnT w="12700" algn="ctr">
+                      <a:noFill/>
+                    </a:lnT>
+                    <a:lnB w="12700" algn="ctr">
                       <a:noFill/>
                     </a:lnB>
                   </a:tcPr>
@@ -3318,16 +3318,16 @@
                     </a:p>
                   </a:txBody>
                   <a:tcPr marL="0" marR="0" marT="0" marB="0" anchor="b">
-                    <a:lnL algn="ctr">
-                      <a:noFill/>
-                    </a:lnL>
-                    <a:lnR algn="ctr">
-                      <a:noFill/>
-                    </a:lnR>
-                    <a:lnT algn="ctr">
-                      <a:noFill/>
-                    </a:lnT>
-                    <a:lnB algn="ctr">
+                    <a:lnL w="12700" algn="ctr">
+                      <a:noFill/>
+                    </a:lnL>
+                    <a:lnR w="12700" algn="ctr">
+                      <a:noFill/>
+                    </a:lnR>
+                    <a:lnT w="12700" algn="ctr">
+                      <a:noFill/>
+                    </a:lnT>
+                    <a:lnB w="12700" algn="ctr">
                       <a:noFill/>
                     </a:lnB>
                   </a:tcPr>
@@ -3358,16 +3358,16 @@
                     </a:p>
                   </a:txBody>
                   <a:tcPr marL="0" marR="0" marT="0" marB="0" anchor="b">
-                    <a:lnL algn="ctr">
-                      <a:noFill/>
-                    </a:lnL>
-                    <a:lnR algn="ctr">
-                      <a:noFill/>
-                    </a:lnR>
-                    <a:lnT algn="ctr">
-                      <a:noFill/>
-                    </a:lnT>
-                    <a:lnB algn="ctr">
+                    <a:lnL w="12700" algn="ctr">
+                      <a:noFill/>
+                    </a:lnL>
+                    <a:lnR w="12700" algn="ctr">
+                      <a:noFill/>
+                    </a:lnR>
+                    <a:lnT w="12700" algn="ctr">
+                      <a:noFill/>
+                    </a:lnT>
+                    <a:lnB w="12700" algn="ctr">
                       <a:noFill/>
                     </a:lnB>
                   </a:tcPr>
@@ -3387,16 +3387,16 @@
                     </a:p>
                   </a:txBody>
                   <a:tcPr marL="0" marR="0" marT="0" marB="0" anchor="b">
-                    <a:lnL algn="ctr">
-                      <a:noFill/>
-                    </a:lnL>
-                    <a:lnR algn="ctr">
-                      <a:noFill/>
-                    </a:lnR>
-                    <a:lnT algn="ctr">
-                      <a:noFill/>
-                    </a:lnT>
-                    <a:lnB algn="ctr">
+                    <a:lnL w="12700" algn="ctr">
+                      <a:noFill/>
+                    </a:lnL>
+                    <a:lnR w="12700" algn="ctr">
+                      <a:noFill/>
+                    </a:lnR>
+                    <a:lnT w="12700" algn="ctr">
+                      <a:noFill/>
+                    </a:lnT>
+                    <a:lnB w="12700" algn="ctr">
                       <a:noFill/>
                     </a:lnB>
                   </a:tcPr>
@@ -3448,16 +3448,16 @@
                     </a:p>
                   </a:txBody>
                   <a:tcPr marL="0" marR="0" marT="0" marB="0" anchor="b">
-                    <a:lnL algn="ctr">
-                      <a:noFill/>
-                    </a:lnL>
-                    <a:lnR algn="ctr">
-                      <a:noFill/>
-                    </a:lnR>
-                    <a:lnT algn="ctr">
-                      <a:noFill/>
-                    </a:lnT>
-                    <a:lnB algn="ctr">
+                    <a:lnL w="12700" algn="ctr">
+                      <a:noFill/>
+                    </a:lnL>
+                    <a:lnR w="12700" algn="ctr">
+                      <a:noFill/>
+                    </a:lnR>
+                    <a:lnT w="12700" algn="ctr">
+                      <a:noFill/>
+                    </a:lnT>
+                    <a:lnB w="12700" algn="ctr">
                       <a:noFill/>
                     </a:lnB>
                   </a:tcPr>
@@ -3477,16 +3477,16 @@
                     </a:p>
                   </a:txBody>
                   <a:tcPr marL="0" marR="0" marT="0" marB="0" anchor="b">
-                    <a:lnL algn="ctr">
-                      <a:noFill/>
-                    </a:lnL>
-                    <a:lnR algn="ctr">
-                      <a:noFill/>
-                    </a:lnR>
-                    <a:lnT algn="ctr">
-                      <a:noFill/>
-                    </a:lnT>
-                    <a:lnB algn="ctr">
+                    <a:lnL w="12700" algn="ctr">
+                      <a:noFill/>
+                    </a:lnL>
+                    <a:lnR w="12700" algn="ctr">
+                      <a:noFill/>
+                    </a:lnR>
+                    <a:lnT w="12700" algn="ctr">
+                      <a:noFill/>
+                    </a:lnT>
+                    <a:lnB w="12700" algn="ctr">
                       <a:noFill/>
                     </a:lnB>
                   </a:tcPr>
@@ -3538,16 +3538,16 @@
                     </a:p>
                   </a:txBody>
                   <a:tcPr marL="0" marR="0" marT="0" marB="0" anchor="b">
-                    <a:lnL algn="ctr">
-                      <a:noFill/>
-                    </a:lnL>
-                    <a:lnR algn="ctr">
-                      <a:noFill/>
-                    </a:lnR>
-                    <a:lnT algn="ctr">
-                      <a:noFill/>
-                    </a:lnT>
-                    <a:lnB algn="ctr">
+                    <a:lnL w="12700" algn="ctr">
+                      <a:noFill/>
+                    </a:lnL>
+                    <a:lnR w="12700" algn="ctr">
+                      <a:noFill/>
+                    </a:lnR>
+                    <a:lnT w="12700" algn="ctr">
+                      <a:noFill/>
+                    </a:lnT>
+                    <a:lnB w="12700" algn="ctr">
                       <a:noFill/>
                     </a:lnB>
                   </a:tcPr>
@@ -3580,16 +3580,16 @@
                     </a:p>
                   </a:txBody>
                   <a:tcPr marL="0" marR="0" marT="0" marB="0" anchor="b">
-                    <a:lnL algn="ctr">
-                      <a:noFill/>
-                    </a:lnL>
-                    <a:lnR algn="ctr">
-                      <a:noFill/>
-                    </a:lnR>
-                    <a:lnT algn="ctr">
-                      <a:noFill/>
-                    </a:lnT>
-                    <a:lnB algn="ctr">
+                    <a:lnL w="12700" algn="ctr">
+                      <a:noFill/>
+                    </a:lnL>
+                    <a:lnR w="12700" algn="ctr">
+                      <a:noFill/>
+                    </a:lnR>
+                    <a:lnT w="12700" algn="ctr">
+                      <a:noFill/>
+                    </a:lnT>
+                    <a:lnB w="12700" algn="ctr">
                       <a:noFill/>
                     </a:lnB>
                   </a:tcPr>
@@ -3616,16 +3616,16 @@
                     </a:p>
                   </a:txBody>
                   <a:tcPr marL="0" marR="0" marT="0" marB="0" anchor="b">
-                    <a:lnL algn="ctr">
-                      <a:noFill/>
-                    </a:lnL>
-                    <a:lnR algn="ctr">
-                      <a:noFill/>
-                    </a:lnR>
-                    <a:lnT algn="ctr">
-                      <a:noFill/>
-                    </a:lnT>
-                    <a:lnB algn="ctr">
+                    <a:lnL w="12700" algn="ctr">
+                      <a:noFill/>
+                    </a:lnL>
+                    <a:lnR w="12700" algn="ctr">
+                      <a:noFill/>
+                    </a:lnR>
+                    <a:lnT w="12700" algn="ctr">
+                      <a:noFill/>
+                    </a:lnT>
+                    <a:lnB w="12700" algn="ctr">
                       <a:noFill/>
                     </a:lnB>
                   </a:tcPr>
@@ -3652,16 +3652,16 @@
                     </a:p>
                   </a:txBody>
                   <a:tcPr marL="0" marR="0" marT="0" marB="0" anchor="b">
-                    <a:lnL algn="ctr">
-                      <a:noFill/>
-                    </a:lnL>
-                    <a:lnR algn="ctr">
-                      <a:noFill/>
-                    </a:lnR>
-                    <a:lnT algn="ctr">
-                      <a:noFill/>
-                    </a:lnT>
-                    <a:lnB algn="ctr">
+                    <a:lnL w="12700" algn="ctr">
+                      <a:noFill/>
+                    </a:lnL>
+                    <a:lnR w="12700" algn="ctr">
+                      <a:noFill/>
+                    </a:lnR>
+                    <a:lnT w="12700" algn="ctr">
+                      <a:noFill/>
+                    </a:lnT>
+                    <a:lnB w="12700" algn="ctr">
                       <a:noFill/>
                     </a:lnB>
                   </a:tcPr>
@@ -3677,16 +3677,16 @@
                     </a:p>
                   </a:txBody>
                   <a:tcPr marL="0" marR="0" marT="0" marB="0" anchor="b">
-                    <a:lnL algn="ctr">
-                      <a:noFill/>
-                    </a:lnL>
-                    <a:lnR algn="ctr">
-                      <a:noFill/>
-                    </a:lnR>
-                    <a:lnT algn="ctr">
-                      <a:noFill/>
-                    </a:lnT>
-                    <a:lnB algn="ctr">
+                    <a:lnL w="12700" algn="ctr">
+                      <a:noFill/>
+                    </a:lnL>
+                    <a:lnR w="12700" algn="ctr">
+                      <a:noFill/>
+                    </a:lnR>
+                    <a:lnT w="12700" algn="ctr">
+                      <a:noFill/>
+                    </a:lnT>
+                    <a:lnB w="12700" algn="ctr">
                       <a:noFill/>
                     </a:lnB>
                   </a:tcPr>
@@ -3713,16 +3713,16 @@
                     </a:p>
                   </a:txBody>
                   <a:tcPr marL="0" marR="0" marT="0" marB="0" anchor="b">
-                    <a:lnL algn="ctr">
-                      <a:noFill/>
-                    </a:lnL>
-                    <a:lnR algn="ctr">
-                      <a:noFill/>
-                    </a:lnR>
-                    <a:lnT algn="ctr">
-                      <a:noFill/>
-                    </a:lnT>
-                    <a:lnB algn="ctr">
+                    <a:lnL w="12700" algn="ctr">
+                      <a:noFill/>
+                    </a:lnL>
+                    <a:lnR w="12700" algn="ctr">
+                      <a:noFill/>
+                    </a:lnR>
+                    <a:lnT w="12700" algn="ctr">
+                      <a:noFill/>
+                    </a:lnT>
+                    <a:lnB w="12700" algn="ctr">
                       <a:noFill/>
                     </a:lnB>
                   </a:tcPr>
@@ -3738,16 +3738,16 @@
                     </a:p>
                   </a:txBody>
                   <a:tcPr marL="0" marR="0" marT="0" marB="0" anchor="b">
-                    <a:lnL algn="ctr">
-                      <a:noFill/>
-                    </a:lnL>
-                    <a:lnR algn="ctr">
-                      <a:noFill/>
-                    </a:lnR>
-                    <a:lnT algn="ctr">
-                      <a:noFill/>
-                    </a:lnT>
-                    <a:lnB algn="ctr">
+                    <a:lnL w="12700" algn="ctr">
+                      <a:noFill/>
+                    </a:lnL>
+                    <a:lnR w="12700" algn="ctr">
+                      <a:noFill/>
+                    </a:lnR>
+                    <a:lnT w="12700" algn="ctr">
+                      <a:noFill/>
+                    </a:lnT>
+                    <a:lnB w="12700" algn="ctr">
                       <a:noFill/>
                     </a:lnB>
                   </a:tcPr>
@@ -3785,16 +3785,16 @@
                     </a:p>
                   </a:txBody>
                   <a:tcPr marL="0" marR="0" marT="0" marB="0" anchor="b">
-                    <a:lnL algn="ctr">
-                      <a:noFill/>
-                    </a:lnL>
-                    <a:lnR algn="ctr">
-                      <a:noFill/>
-                    </a:lnR>
-                    <a:lnT algn="ctr">
-                      <a:noFill/>
-                    </a:lnT>
-                    <a:lnB algn="ctr">
+                    <a:lnL w="12700" algn="ctr">
+                      <a:noFill/>
+                    </a:lnL>
+                    <a:lnR w="12700" algn="ctr">
+                      <a:noFill/>
+                    </a:lnR>
+                    <a:lnT w="12700" algn="ctr">
+                      <a:noFill/>
+                    </a:lnT>
+                    <a:lnB w="12700" algn="ctr">
                       <a:noFill/>
                     </a:lnB>
                   </a:tcPr>
@@ -3827,16 +3827,16 @@
                     </a:p>
                   </a:txBody>
                   <a:tcPr marL="0" marR="0" marT="0" marB="0" anchor="b">
-                    <a:lnL algn="ctr">
-                      <a:noFill/>
-                    </a:lnL>
-                    <a:lnR algn="ctr">
-                      <a:noFill/>
-                    </a:lnR>
-                    <a:lnT algn="ctr">
-                      <a:noFill/>
-                    </a:lnT>
-                    <a:lnB algn="ctr">
+                    <a:lnL w="12700" algn="ctr">
+                      <a:noFill/>
+                    </a:lnL>
+                    <a:lnR w="12700" algn="ctr">
+                      <a:noFill/>
+                    </a:lnR>
+                    <a:lnT w="12700" algn="ctr">
+                      <a:noFill/>
+                    </a:lnT>
+                    <a:lnB w="12700" algn="ctr">
                       <a:noFill/>
                     </a:lnB>
                   </a:tcPr>
@@ -3863,16 +3863,16 @@
                     </a:p>
                   </a:txBody>
                   <a:tcPr marL="0" marR="0" marT="0" marB="0" anchor="b">
-                    <a:lnL algn="ctr">
-                      <a:noFill/>
-                    </a:lnL>
-                    <a:lnR algn="ctr">
-                      <a:noFill/>
-                    </a:lnR>
-                    <a:lnT algn="ctr">
-                      <a:noFill/>
-                    </a:lnT>
-                    <a:lnB algn="ctr">
+                    <a:lnL w="12700" algn="ctr">
+                      <a:noFill/>
+                    </a:lnL>
+                    <a:lnR w="12700" algn="ctr">
+                      <a:noFill/>
+                    </a:lnR>
+                    <a:lnT w="12700" algn="ctr">
+                      <a:noFill/>
+                    </a:lnT>
+                    <a:lnB w="12700" algn="ctr">
                       <a:noFill/>
                     </a:lnB>
                   </a:tcPr>
@@ -3899,16 +3899,16 @@
                     </a:p>
                   </a:txBody>
                   <a:tcPr marL="0" marR="0" marT="0" marB="0" anchor="b">
-                    <a:lnL algn="ctr">
-                      <a:noFill/>
-                    </a:lnL>
-                    <a:lnR algn="ctr">
-                      <a:noFill/>
-                    </a:lnR>
-                    <a:lnT algn="ctr">
-                      <a:noFill/>
-                    </a:lnT>
-                    <a:lnB algn="ctr">
+                    <a:lnL w="12700" algn="ctr">
+                      <a:noFill/>
+                    </a:lnL>
+                    <a:lnR w="12700" algn="ctr">
+                      <a:noFill/>
+                    </a:lnR>
+                    <a:lnT w="12700" algn="ctr">
+                      <a:noFill/>
+                    </a:lnT>
+                    <a:lnB w="12700" algn="ctr">
                       <a:noFill/>
                     </a:lnB>
                   </a:tcPr>
@@ -3924,16 +3924,16 @@
                     </a:p>
                   </a:txBody>
                   <a:tcPr marL="0" marR="0" marT="0" marB="0" anchor="b">
-                    <a:lnL algn="ctr">
-                      <a:noFill/>
-                    </a:lnL>
-                    <a:lnR algn="ctr">
-                      <a:noFill/>
-                    </a:lnR>
-                    <a:lnT algn="ctr">
-                      <a:noFill/>
-                    </a:lnT>
-                    <a:lnB algn="ctr">
+                    <a:lnL w="12700" algn="ctr">
+                      <a:noFill/>
+                    </a:lnL>
+                    <a:lnR w="12700" algn="ctr">
+                      <a:noFill/>
+                    </a:lnR>
+                    <a:lnT w="12700" algn="ctr">
+                      <a:noFill/>
+                    </a:lnT>
+                    <a:lnB w="12700" algn="ctr">
                       <a:noFill/>
                     </a:lnB>
                   </a:tcPr>
@@ -3971,16 +3971,16 @@
                     </a:p>
                   </a:txBody>
                   <a:tcPr marL="0" marR="0" marT="0" marB="0" anchor="b">
-                    <a:lnL algn="ctr">
-                      <a:noFill/>
-                    </a:lnL>
-                    <a:lnR algn="ctr">
-                      <a:noFill/>
-                    </a:lnR>
-                    <a:lnT algn="ctr">
-                      <a:noFill/>
-                    </a:lnT>
-                    <a:lnB algn="ctr">
+                    <a:lnL w="12700" algn="ctr">
+                      <a:noFill/>
+                    </a:lnL>
+                    <a:lnR w="12700" algn="ctr">
+                      <a:noFill/>
+                    </a:lnR>
+                    <a:lnT w="12700" algn="ctr">
+                      <a:noFill/>
+                    </a:lnT>
+                    <a:lnB w="12700" algn="ctr">
                       <a:noFill/>
                     </a:lnB>
                   </a:tcPr>
@@ -3996,16 +3996,16 @@
                     </a:p>
                   </a:txBody>
                   <a:tcPr marL="0" marR="0" marT="0" marB="0" anchor="b">
-                    <a:lnL algn="ctr">
-                      <a:noFill/>
-                    </a:lnL>
-                    <a:lnR algn="ctr">
-                      <a:noFill/>
-                    </a:lnR>
-                    <a:lnT algn="ctr">
-                      <a:noFill/>
-                    </a:lnT>
-                    <a:lnB algn="ctr">
+                    <a:lnL w="12700" algn="ctr">
+                      <a:noFill/>
+                    </a:lnL>
+                    <a:lnR w="12700" algn="ctr">
+                      <a:noFill/>
+                    </a:lnR>
+                    <a:lnT w="12700" algn="ctr">
+                      <a:noFill/>
+                    </a:lnT>
+                    <a:lnB w="12700" algn="ctr">
                       <a:noFill/>
                     </a:lnB>
                   </a:tcPr>
@@ -4043,16 +4043,16 @@
                     </a:p>
                   </a:txBody>
                   <a:tcPr marL="0" marR="0" marT="0" marB="0" anchor="b">
-                    <a:lnL algn="ctr">
-                      <a:noFill/>
-                    </a:lnL>
-                    <a:lnR algn="ctr">
-                      <a:noFill/>
-                    </a:lnR>
-                    <a:lnT algn="ctr">
-                      <a:noFill/>
-                    </a:lnT>
-                    <a:lnB algn="ctr">
+                    <a:lnL w="12700" algn="ctr">
+                      <a:noFill/>
+                    </a:lnL>
+                    <a:lnR w="12700" algn="ctr">
+                      <a:noFill/>
+                    </a:lnR>
+                    <a:lnT w="12700" algn="ctr">
+                      <a:noFill/>
+                    </a:lnT>
+                    <a:lnB w="12700" algn="ctr">
                       <a:noFill/>
                     </a:lnB>
                   </a:tcPr>
@@ -4085,16 +4085,16 @@
                     </a:p>
                   </a:txBody>
                   <a:tcPr marL="0" marR="0" marT="0" marB="0" anchor="b">
-                    <a:lnL algn="ctr">
-                      <a:noFill/>
-                    </a:lnL>
-                    <a:lnR algn="ctr">
-                      <a:noFill/>
-                    </a:lnR>
-                    <a:lnT algn="ctr">
-                      <a:noFill/>
-                    </a:lnT>
-                    <a:lnB algn="ctr">
+                    <a:lnL w="12700" algn="ctr">
+                      <a:noFill/>
+                    </a:lnL>
+                    <a:lnR w="12700" algn="ctr">
+                      <a:noFill/>
+                    </a:lnR>
+                    <a:lnT w="12700" algn="ctr">
+                      <a:noFill/>
+                    </a:lnT>
+                    <a:lnB w="12700" algn="ctr">
                       <a:noFill/>
                     </a:lnB>
                   </a:tcPr>
@@ -4121,16 +4121,16 @@
                     </a:p>
                   </a:txBody>
                   <a:tcPr marL="0" marR="0" marT="0" marB="0" anchor="b">
-                    <a:lnL algn="ctr">
-                      <a:noFill/>
-                    </a:lnL>
-                    <a:lnR algn="ctr">
-                      <a:noFill/>
-                    </a:lnR>
-                    <a:lnT algn="ctr">
-                      <a:noFill/>
-                    </a:lnT>
-                    <a:lnB algn="ctr">
+                    <a:lnL w="12700" algn="ctr">
+                      <a:noFill/>
+                    </a:lnL>
+                    <a:lnR w="12700" algn="ctr">
+                      <a:noFill/>
+                    </a:lnR>
+                    <a:lnT w="12700" algn="ctr">
+                      <a:noFill/>
+                    </a:lnT>
+                    <a:lnB w="12700" algn="ctr">
                       <a:noFill/>
                     </a:lnB>
                   </a:tcPr>
@@ -4157,16 +4157,16 @@
                     </a:p>
                   </a:txBody>
                   <a:tcPr marL="0" marR="0" marT="0" marB="0" anchor="b">
-                    <a:lnL algn="ctr">
-                      <a:noFill/>
-                    </a:lnL>
-                    <a:lnR algn="ctr">
-                      <a:noFill/>
-                    </a:lnR>
-                    <a:lnT algn="ctr">
-                      <a:noFill/>
-                    </a:lnT>
-                    <a:lnB algn="ctr">
+                    <a:lnL w="12700" algn="ctr">
+                      <a:noFill/>
+                    </a:lnL>
+                    <a:lnR w="12700" algn="ctr">
+                      <a:noFill/>
+                    </a:lnR>
+                    <a:lnT w="12700" algn="ctr">
+                      <a:noFill/>
+                    </a:lnT>
+                    <a:lnB w="12700" algn="ctr">
                       <a:noFill/>
                     </a:lnB>
                   </a:tcPr>
@@ -4182,16 +4182,16 @@
                     </a:p>
                   </a:txBody>
                   <a:tcPr marL="0" marR="0" marT="0" marB="0" anchor="b">
-                    <a:lnL algn="ctr">
-                      <a:noFill/>
-                    </a:lnL>
-                    <a:lnR algn="ctr">
-                      <a:noFill/>
-                    </a:lnR>
-                    <a:lnT algn="ctr">
-                      <a:noFill/>
-                    </a:lnT>
-                    <a:lnB algn="ctr">
+                    <a:lnL w="12700" algn="ctr">
+                      <a:noFill/>
+                    </a:lnL>
+                    <a:lnR w="12700" algn="ctr">
+                      <a:noFill/>
+                    </a:lnR>
+                    <a:lnT w="12700" algn="ctr">
+                      <a:noFill/>
+                    </a:lnT>
+                    <a:lnB w="12700" algn="ctr">
                       <a:noFill/>
                     </a:lnB>
                   </a:tcPr>
@@ -4229,16 +4229,16 @@
                     </a:p>
                   </a:txBody>
                   <a:tcPr marL="0" marR="0" marT="0" marB="0" anchor="b">
-                    <a:lnL algn="ctr">
-                      <a:noFill/>
-                    </a:lnL>
-                    <a:lnR algn="ctr">
-                      <a:noFill/>
-                    </a:lnR>
-                    <a:lnT algn="ctr">
-                      <a:noFill/>
-                    </a:lnT>
-                    <a:lnB algn="ctr">
+                    <a:lnL w="12700" algn="ctr">
+                      <a:noFill/>
+                    </a:lnL>
+                    <a:lnR w="12700" algn="ctr">
+                      <a:noFill/>
+                    </a:lnR>
+                    <a:lnT w="12700" algn="ctr">
+                      <a:noFill/>
+                    </a:lnT>
+                    <a:lnB w="12700" algn="ctr">
                       <a:noFill/>
                     </a:lnB>
                   </a:tcPr>
@@ -4254,16 +4254,16 @@
                     </a:p>
                   </a:txBody>
                   <a:tcPr marL="0" marR="0" marT="0" marB="0" anchor="b">
-                    <a:lnL algn="ctr">
-                      <a:noFill/>
-                    </a:lnL>
-                    <a:lnR algn="ctr">
-                      <a:noFill/>
-                    </a:lnR>
-                    <a:lnT algn="ctr">
-                      <a:noFill/>
-                    </a:lnT>
-                    <a:lnB algn="ctr">
+                    <a:lnL w="12700" algn="ctr">
+                      <a:noFill/>
+                    </a:lnL>
+                    <a:lnR w="12700" algn="ctr">
+                      <a:noFill/>
+                    </a:lnR>
+                    <a:lnT w="12700" algn="ctr">
+                      <a:noFill/>
+                    </a:lnT>
+                    <a:lnB w="12700" algn="ctr">
                       <a:noFill/>
                     </a:lnB>
                   </a:tcPr>
@@ -4301,16 +4301,16 @@
                     </a:p>
                   </a:txBody>
                   <a:tcPr marL="0" marR="0" marT="0" marB="0" anchor="b">
-                    <a:lnL algn="ctr">
-                      <a:noFill/>
-                    </a:lnL>
-                    <a:lnR algn="ctr">
-                      <a:noFill/>
-                    </a:lnR>
-                    <a:lnT algn="ctr">
-                      <a:noFill/>
-                    </a:lnT>
-                    <a:lnB algn="ctr">
+                    <a:lnL w="12700" algn="ctr">
+                      <a:noFill/>
+                    </a:lnL>
+                    <a:lnR w="12700" algn="ctr">
+                      <a:noFill/>
+                    </a:lnR>
+                    <a:lnT w="12700" algn="ctr">
+                      <a:noFill/>
+                    </a:lnT>
+                    <a:lnB w="12700" algn="ctr">
                       <a:noFill/>
                     </a:lnB>
                   </a:tcPr>
@@ -4343,16 +4343,16 @@
                     </a:p>
                   </a:txBody>
                   <a:tcPr marL="0" marR="0" marT="0" marB="0" anchor="b">
-                    <a:lnL algn="ctr">
-                      <a:noFill/>
-                    </a:lnL>
-                    <a:lnR algn="ctr">
-                      <a:noFill/>
-                    </a:lnR>
-                    <a:lnT algn="ctr">
-                      <a:noFill/>
-                    </a:lnT>
-                    <a:lnB algn="ctr">
+                    <a:lnL w="12700" algn="ctr">
+                      <a:noFill/>
+                    </a:lnL>
+                    <a:lnR w="12700" algn="ctr">
+                      <a:noFill/>
+                    </a:lnR>
+                    <a:lnT w="12700" algn="ctr">
+                      <a:noFill/>
+                    </a:lnT>
+                    <a:lnB w="12700" algn="ctr">
                       <a:noFill/>
                     </a:lnB>
                   </a:tcPr>
@@ -4379,16 +4379,16 @@
                     </a:p>
                   </a:txBody>
                   <a:tcPr marL="0" marR="0" marT="0" marB="0" anchor="b">
-                    <a:lnL algn="ctr">
-                      <a:noFill/>
-                    </a:lnL>
-                    <a:lnR algn="ctr">
-                      <a:noFill/>
-                    </a:lnR>
-                    <a:lnT algn="ctr">
-                      <a:noFill/>
-                    </a:lnT>
-                    <a:lnB algn="ctr">
+                    <a:lnL w="12700" algn="ctr">
+                      <a:noFill/>
+                    </a:lnL>
+                    <a:lnR w="12700" algn="ctr">
+                      <a:noFill/>
+                    </a:lnR>
+                    <a:lnT w="12700" algn="ctr">
+                      <a:noFill/>
+                    </a:lnT>
+                    <a:lnB w="12700" algn="ctr">
                       <a:noFill/>
                     </a:lnB>
                   </a:tcPr>
@@ -4415,16 +4415,16 @@
                     </a:p>
                   </a:txBody>
                   <a:tcPr marL="0" marR="0" marT="0" marB="0" anchor="b">
-                    <a:lnL algn="ctr">
-                      <a:noFill/>
-                    </a:lnL>
-                    <a:lnR algn="ctr">
-                      <a:noFill/>
-                    </a:lnR>
-                    <a:lnT algn="ctr">
-                      <a:noFill/>
-                    </a:lnT>
-                    <a:lnB algn="ctr">
+                    <a:lnL w="12700" algn="ctr">
+                      <a:noFill/>
+                    </a:lnL>
+                    <a:lnR w="12700" algn="ctr">
+                      <a:noFill/>
+                    </a:lnR>
+                    <a:lnT w="12700" algn="ctr">
+                      <a:noFill/>
+                    </a:lnT>
+                    <a:lnB w="12700" algn="ctr">
                       <a:noFill/>
                     </a:lnB>
                   </a:tcPr>
@@ -4440,16 +4440,16 @@
                     </a:p>
                   </a:txBody>
                   <a:tcPr marL="0" marR="0" marT="0" marB="0" anchor="b">
-                    <a:lnL algn="ctr">
-                      <a:noFill/>
-                    </a:lnL>
-                    <a:lnR algn="ctr">
-                      <a:noFill/>
-                    </a:lnR>
-                    <a:lnT algn="ctr">
-                      <a:noFill/>
-                    </a:lnT>
-                    <a:lnB algn="ctr">
+                    <a:lnL w="12700" algn="ctr">
+                      <a:noFill/>
+                    </a:lnL>
+                    <a:lnR w="12700" algn="ctr">
+                      <a:noFill/>
+                    </a:lnR>
+                    <a:lnT w="12700" algn="ctr">
+                      <a:noFill/>
+                    </a:lnT>
+                    <a:lnB w="12700" algn="ctr">
                       <a:noFill/>
                     </a:lnB>
                   </a:tcPr>
@@ -4487,16 +4487,16 @@
                     </a:p>
                   </a:txBody>
                   <a:tcPr marL="0" marR="0" marT="0" marB="0" anchor="b">
-                    <a:lnL algn="ctr">
-                      <a:noFill/>
-                    </a:lnL>
-                    <a:lnR algn="ctr">
-                      <a:noFill/>
-                    </a:lnR>
-                    <a:lnT algn="ctr">
-                      <a:noFill/>
-                    </a:lnT>
-                    <a:lnB algn="ctr">
+                    <a:lnL w="12700" algn="ctr">
+                      <a:noFill/>
+                    </a:lnL>
+                    <a:lnR w="12700" algn="ctr">
+                      <a:noFill/>
+                    </a:lnR>
+                    <a:lnT w="12700" algn="ctr">
+                      <a:noFill/>
+                    </a:lnT>
+                    <a:lnB w="12700" algn="ctr">
                       <a:noFill/>
                     </a:lnB>
                   </a:tcPr>
@@ -4512,16 +4512,16 @@
                     </a:p>
                   </a:txBody>
                   <a:tcPr marL="0" marR="0" marT="0" marB="0" anchor="b">
-                    <a:lnL algn="ctr">
-                      <a:noFill/>
-                    </a:lnL>
-                    <a:lnR algn="ctr">
-                      <a:noFill/>
-                    </a:lnR>
-                    <a:lnT algn="ctr">
-                      <a:noFill/>
-                    </a:lnT>
-                    <a:lnB algn="ctr">
+                    <a:lnL w="12700" algn="ctr">
+                      <a:noFill/>
+                    </a:lnL>
+                    <a:lnR w="12700" algn="ctr">
+                      <a:noFill/>
+                    </a:lnR>
+                    <a:lnT w="12700" algn="ctr">
+                      <a:noFill/>
+                    </a:lnT>
+                    <a:lnB w="12700" algn="ctr">
                       <a:noFill/>
                     </a:lnB>
                   </a:tcPr>
@@ -4559,16 +4559,16 @@
                     </a:p>
                   </a:txBody>
                   <a:tcPr marL="0" marR="0" marT="0" marB="0" anchor="b">
-                    <a:lnL algn="ctr">
-                      <a:noFill/>
-                    </a:lnL>
-                    <a:lnR algn="ctr">
-                      <a:noFill/>
-                    </a:lnR>
-                    <a:lnT algn="ctr">
-                      <a:noFill/>
-                    </a:lnT>
-                    <a:lnB algn="ctr">
+                    <a:lnL w="12700" algn="ctr">
+                      <a:noFill/>
+                    </a:lnL>
+                    <a:lnR w="12700" algn="ctr">
+                      <a:noFill/>
+                    </a:lnR>
+                    <a:lnT w="12700" algn="ctr">
+                      <a:noFill/>
+                    </a:lnT>
+                    <a:lnB w="12700" algn="ctr">
                       <a:noFill/>
                     </a:lnB>
                   </a:tcPr>
@@ -4601,16 +4601,16 @@
                     </a:p>
                   </a:txBody>
                   <a:tcPr marL="0" marR="0" marT="0" marB="0" anchor="b">
-                    <a:lnL algn="ctr">
-                      <a:noFill/>
-                    </a:lnL>
-                    <a:lnR algn="ctr">
-                      <a:noFill/>
-                    </a:lnR>
-                    <a:lnT algn="ctr">
-                      <a:noFill/>
-                    </a:lnT>
-                    <a:lnB algn="ctr">
+                    <a:lnL w="12700" algn="ctr">
+                      <a:noFill/>
+                    </a:lnL>
+                    <a:lnR w="12700" algn="ctr">
+                      <a:noFill/>
+                    </a:lnR>
+                    <a:lnT w="12700" algn="ctr">
+                      <a:noFill/>
+                    </a:lnT>
+                    <a:lnB w="12700" algn="ctr">
                       <a:noFill/>
                     </a:lnB>
                   </a:tcPr>
@@ -4637,16 +4637,16 @@
                     </a:p>
                   </a:txBody>
                   <a:tcPr marL="0" marR="0" marT="0" marB="0" anchor="b">
-                    <a:lnL algn="ctr">
-                      <a:noFill/>
-                    </a:lnL>
-                    <a:lnR algn="ctr">
-                      <a:noFill/>
-                    </a:lnR>
-                    <a:lnT algn="ctr">
-                      <a:noFill/>
-                    </a:lnT>
-                    <a:lnB algn="ctr">
+                    <a:lnL w="12700" algn="ctr">
+                      <a:noFill/>
+                    </a:lnL>
+                    <a:lnR w="12700" algn="ctr">
+                      <a:noFill/>
+                    </a:lnR>
+                    <a:lnT w="12700" algn="ctr">
+                      <a:noFill/>
+                    </a:lnT>
+                    <a:lnB w="12700" algn="ctr">
                       <a:noFill/>
                     </a:lnB>
                   </a:tcPr>
@@ -4673,16 +4673,16 @@
                     </a:p>
                   </a:txBody>
                   <a:tcPr marL="0" marR="0" marT="0" marB="0" anchor="b">
-                    <a:lnL algn="ctr">
-                      <a:noFill/>
-                    </a:lnL>
-                    <a:lnR algn="ctr">
-                      <a:noFill/>
-                    </a:lnR>
-                    <a:lnT algn="ctr">
-                      <a:noFill/>
-                    </a:lnT>
-                    <a:lnB algn="ctr">
+                    <a:lnL w="12700" algn="ctr">
+                      <a:noFill/>
+                    </a:lnL>
+                    <a:lnR w="12700" algn="ctr">
+                      <a:noFill/>
+                    </a:lnR>
+                    <a:lnT w="12700" algn="ctr">
+                      <a:noFill/>
+                    </a:lnT>
+                    <a:lnB w="12700" algn="ctr">
                       <a:noFill/>
                     </a:lnB>
                   </a:tcPr>
@@ -4698,16 +4698,16 @@
                     </a:p>
                   </a:txBody>
                   <a:tcPr marL="0" marR="0" marT="0" marB="0" anchor="b">
-                    <a:lnL algn="ctr">
-                      <a:noFill/>
-                    </a:lnL>
-                    <a:lnR algn="ctr">
-                      <a:noFill/>
-                    </a:lnR>
-                    <a:lnT algn="ctr">
-                      <a:noFill/>
-                    </a:lnT>
-                    <a:lnB algn="ctr">
+                    <a:lnL w="12700" algn="ctr">
+                      <a:noFill/>
+                    </a:lnL>
+                    <a:lnR w="12700" algn="ctr">
+                      <a:noFill/>
+                    </a:lnR>
+                    <a:lnT w="12700" algn="ctr">
+                      <a:noFill/>
+                    </a:lnT>
+                    <a:lnB w="12700" algn="ctr">
                       <a:noFill/>
                     </a:lnB>
                   </a:tcPr>
@@ -4745,16 +4745,16 @@
                     </a:p>
                   </a:txBody>
                   <a:tcPr marL="0" marR="0" marT="0" marB="0" anchor="b">
-                    <a:lnL algn="ctr">
-                      <a:noFill/>
-                    </a:lnL>
-                    <a:lnR algn="ctr">
-                      <a:noFill/>
-                    </a:lnR>
-                    <a:lnT algn="ctr">
-                      <a:noFill/>
-                    </a:lnT>
-                    <a:lnB algn="ctr">
+                    <a:lnL w="12700" algn="ctr">
+                      <a:noFill/>
+                    </a:lnL>
+                    <a:lnR w="12700" algn="ctr">
+                      <a:noFill/>
+                    </a:lnR>
+                    <a:lnT w="12700" algn="ctr">
+                      <a:noFill/>
+                    </a:lnT>
+                    <a:lnB w="12700" algn="ctr">
                       <a:noFill/>
                     </a:lnB>
                   </a:tcPr>
@@ -4770,16 +4770,16 @@
                     </a:p>
                   </a:txBody>
                   <a:tcPr marL="0" marR="0" marT="0" marB="0" anchor="b">
-                    <a:lnL algn="ctr">
-                      <a:noFill/>
-                    </a:lnL>
-                    <a:lnR algn="ctr">
-                      <a:noFill/>
-                    </a:lnR>
-                    <a:lnT algn="ctr">
-                      <a:noFill/>
-                    </a:lnT>
-                    <a:lnB algn="ctr">
+                    <a:lnL w="12700" algn="ctr">
+                      <a:noFill/>
+                    </a:lnL>
+                    <a:lnR w="12700" algn="ctr">
+                      <a:noFill/>
+                    </a:lnR>
+                    <a:lnT w="12700" algn="ctr">
+                      <a:noFill/>
+                    </a:lnT>
+                    <a:lnB w="12700" algn="ctr">
                       <a:noFill/>
                     </a:lnB>
                   </a:tcPr>
@@ -4817,16 +4817,16 @@
                     </a:p>
                   </a:txBody>
                   <a:tcPr marL="0" marR="0" marT="0" marB="0" anchor="b">
-                    <a:lnL algn="ctr">
-                      <a:noFill/>
-                    </a:lnL>
-                    <a:lnR algn="ctr">
-                      <a:noFill/>
-                    </a:lnR>
-                    <a:lnT algn="ctr">
-                      <a:noFill/>
-                    </a:lnT>
-                    <a:lnB algn="ctr">
+                    <a:lnL w="12700" algn="ctr">
+                      <a:noFill/>
+                    </a:lnL>
+                    <a:lnR w="12700" algn="ctr">
+                      <a:noFill/>
+                    </a:lnR>
+                    <a:lnT w="12700" algn="ctr">
+                      <a:noFill/>
+                    </a:lnT>
+                    <a:lnB w="12700" algn="ctr">
                       <a:noFill/>
                     </a:lnB>
                   </a:tcPr>
@@ -4859,16 +4859,16 @@
                     </a:p>
                   </a:txBody>
                   <a:tcPr marL="0" marR="0" marT="0" marB="0" anchor="b">
-                    <a:lnL algn="ctr">
-                      <a:noFill/>
-                    </a:lnL>
-                    <a:lnR algn="ctr">
-                      <a:noFill/>
-                    </a:lnR>
-                    <a:lnT algn="ctr">
-                      <a:noFill/>
-                    </a:lnT>
-                    <a:lnB algn="ctr">
+                    <a:lnL w="12700" algn="ctr">
+                      <a:noFill/>
+                    </a:lnL>
+                    <a:lnR w="12700" algn="ctr">
+                      <a:noFill/>
+                    </a:lnR>
+                    <a:lnT w="12700" algn="ctr">
+                      <a:noFill/>
+                    </a:lnT>
+                    <a:lnB w="12700" algn="ctr">
                       <a:noFill/>
                     </a:lnB>
                   </a:tcPr>
@@ -4895,16 +4895,16 @@
                     </a:p>
                   </a:txBody>
                   <a:tcPr marL="0" marR="0" marT="0" marB="0" anchor="b">
-                    <a:lnL algn="ctr">
-                      <a:noFill/>
-                    </a:lnL>
-                    <a:lnR algn="ctr">
-                      <a:noFill/>
-                    </a:lnR>
-                    <a:lnT algn="ctr">
-                      <a:noFill/>
-                    </a:lnT>
-                    <a:lnB algn="ctr">
+                    <a:lnL w="12700" algn="ctr">
+                      <a:noFill/>
+                    </a:lnL>
+                    <a:lnR w="12700" algn="ctr">
+                      <a:noFill/>
+                    </a:lnR>
+                    <a:lnT w="12700" algn="ctr">
+                      <a:noFill/>
+                    </a:lnT>
+                    <a:lnB w="12700" algn="ctr">
                       <a:noFill/>
                     </a:lnB>
                   </a:tcPr>
@@ -4931,16 +4931,16 @@
                     </a:p>
                   </a:txBody>
                   <a:tcPr marL="0" marR="0" marT="0" marB="0" anchor="b">
-                    <a:lnL algn="ctr">
-                      <a:noFill/>
-                    </a:lnL>
-                    <a:lnR algn="ctr">
-                      <a:noFill/>
-                    </a:lnR>
-                    <a:lnT algn="ctr">
-                      <a:noFill/>
-                    </a:lnT>
-                    <a:lnB algn="ctr">
+                    <a:lnL w="12700" algn="ctr">
+                      <a:noFill/>
+                    </a:lnL>
+                    <a:lnR w="12700" algn="ctr">
+                      <a:noFill/>
+                    </a:lnR>
+                    <a:lnT w="12700" algn="ctr">
+                      <a:noFill/>
+                    </a:lnT>
+                    <a:lnB w="12700" algn="ctr">
                       <a:noFill/>
                     </a:lnB>
                   </a:tcPr>
@@ -4956,16 +4956,16 @@
                     </a:p>
                   </a:txBody>
                   <a:tcPr marL="0" marR="0" marT="0" marB="0" anchor="b">
-                    <a:lnL algn="ctr">
-                      <a:noFill/>
-                    </a:lnL>
-                    <a:lnR algn="ctr">
-                      <a:noFill/>
-                    </a:lnR>
-                    <a:lnT algn="ctr">
-                      <a:noFill/>
-                    </a:lnT>
-                    <a:lnB algn="ctr">
+                    <a:lnL w="12700" algn="ctr">
+                      <a:noFill/>
+                    </a:lnL>
+                    <a:lnR w="12700" algn="ctr">
+                      <a:noFill/>
+                    </a:lnR>
+                    <a:lnT w="12700" algn="ctr">
+                      <a:noFill/>
+                    </a:lnT>
+                    <a:lnB w="12700" algn="ctr">
                       <a:noFill/>
                     </a:lnB>
                   </a:tcPr>
@@ -5003,16 +5003,16 @@
                     </a:p>
                   </a:txBody>
                   <a:tcPr marL="0" marR="0" marT="0" marB="0" anchor="b">
-                    <a:lnL algn="ctr">
-                      <a:noFill/>
-                    </a:lnL>
-                    <a:lnR algn="ctr">
-                      <a:noFill/>
-                    </a:lnR>
-                    <a:lnT algn="ctr">
-                      <a:noFill/>
-                    </a:lnT>
-                    <a:lnB algn="ctr">
+                    <a:lnL w="12700" algn="ctr">
+                      <a:noFill/>
+                    </a:lnL>
+                    <a:lnR w="12700" algn="ctr">
+                      <a:noFill/>
+                    </a:lnR>
+                    <a:lnT w="12700" algn="ctr">
+                      <a:noFill/>
+                    </a:lnT>
+                    <a:lnB w="12700" algn="ctr">
                       <a:noFill/>
                     </a:lnB>
                   </a:tcPr>
@@ -5028,16 +5028,16 @@
                     </a:p>
                   </a:txBody>
                   <a:tcPr marL="0" marR="0" marT="0" marB="0" anchor="b">
-                    <a:lnL algn="ctr">
-                      <a:noFill/>
-                    </a:lnL>
-                    <a:lnR algn="ctr">
-                      <a:noFill/>
-                    </a:lnR>
-                    <a:lnT algn="ctr">
-                      <a:noFill/>
-                    </a:lnT>
-                    <a:lnB algn="ctr">
+                    <a:lnL w="12700" algn="ctr">
+                      <a:noFill/>
+                    </a:lnL>
+                    <a:lnR w="12700" algn="ctr">
+                      <a:noFill/>
+                    </a:lnR>
+                    <a:lnT w="12700" algn="ctr">
+                      <a:noFill/>
+                    </a:lnT>
+                    <a:lnB w="12700" algn="ctr">
                       <a:noFill/>
                     </a:lnB>
                   </a:tcPr>
@@ -5075,16 +5075,16 @@
                     </a:p>
                   </a:txBody>
                   <a:tcPr marL="0" marR="0" marT="0" marB="0" anchor="b">
-                    <a:lnL algn="ctr">
-                      <a:noFill/>
-                    </a:lnL>
-                    <a:lnR algn="ctr">
-                      <a:noFill/>
-                    </a:lnR>
-                    <a:lnT algn="ctr">
-                      <a:noFill/>
-                    </a:lnT>
-                    <a:lnB algn="ctr">
+                    <a:lnL w="12700" algn="ctr">
+                      <a:noFill/>
+                    </a:lnL>
+                    <a:lnR w="12700" algn="ctr">
+                      <a:noFill/>
+                    </a:lnR>
+                    <a:lnT w="12700" algn="ctr">
+                      <a:noFill/>
+                    </a:lnT>
+                    <a:lnB w="12700" algn="ctr">
                       <a:noFill/>
                     </a:lnB>
                   </a:tcPr>
@@ -5117,16 +5117,16 @@
                     </a:p>
                   </a:txBody>
                   <a:tcPr marL="0" marR="0" marT="0" marB="0" anchor="b">
-                    <a:lnL algn="ctr">
-                      <a:noFill/>
-                    </a:lnL>
-                    <a:lnR algn="ctr">
-                      <a:noFill/>
-                    </a:lnR>
-                    <a:lnT algn="ctr">
-                      <a:noFill/>
-                    </a:lnT>
-                    <a:lnB algn="ctr">
+                    <a:lnL w="12700" algn="ctr">
+                      <a:noFill/>
+                    </a:lnL>
+                    <a:lnR w="12700" algn="ctr">
+                      <a:noFill/>
+                    </a:lnR>
+                    <a:lnT w="12700" algn="ctr">
+                      <a:noFill/>
+                    </a:lnT>
+                    <a:lnB w="12700" algn="ctr">
                       <a:noFill/>
                     </a:lnB>
                   </a:tcPr>
@@ -5153,16 +5153,16 @@
                     </a:p>
                   </a:txBody>
                   <a:tcPr marL="0" marR="0" marT="0" marB="0" anchor="b">
-                    <a:lnL algn="ctr">
-                      <a:noFill/>
-                    </a:lnL>
-                    <a:lnR algn="ctr">
-                      <a:noFill/>
-                    </a:lnR>
-                    <a:lnT algn="ctr">
-                      <a:noFill/>
-                    </a:lnT>
-                    <a:lnB algn="ctr">
+                    <a:lnL w="12700" algn="ctr">
+                      <a:noFill/>
+                    </a:lnL>
+                    <a:lnR w="12700" algn="ctr">
+                      <a:noFill/>
+                    </a:lnR>
+                    <a:lnT w="12700" algn="ctr">
+                      <a:noFill/>
+                    </a:lnT>
+                    <a:lnB w="12700" algn="ctr">
                       <a:noFill/>
                     </a:lnB>
                   </a:tcPr>
@@ -5189,16 +5189,16 @@
                     </a:p>
                   </a:txBody>
                   <a:tcPr marL="0" marR="0" marT="0" marB="0" anchor="b">
-                    <a:lnL algn="ctr">
-                      <a:noFill/>
-                    </a:lnL>
-                    <a:lnR algn="ctr">
-                      <a:noFill/>
-                    </a:lnR>
-                    <a:lnT algn="ctr">
-                      <a:noFill/>
-                    </a:lnT>
-                    <a:lnB algn="ctr">
+                    <a:lnL w="12700" algn="ctr">
+                      <a:noFill/>
+                    </a:lnL>
+                    <a:lnR w="12700" algn="ctr">
+                      <a:noFill/>
+                    </a:lnR>
+                    <a:lnT w="12700" algn="ctr">
+                      <a:noFill/>
+                    </a:lnT>
+                    <a:lnB w="12700" algn="ctr">
                       <a:noFill/>
                     </a:lnB>
                   </a:tcPr>
@@ -5214,16 +5214,16 @@
                     </a:p>
                   </a:txBody>
                   <a:tcPr marL="0" marR="0" marT="0" marB="0" anchor="b">
-                    <a:lnL algn="ctr">
-                      <a:noFill/>
-                    </a:lnL>
-                    <a:lnR algn="ctr">
-                      <a:noFill/>
-                    </a:lnR>
-                    <a:lnT algn="ctr">
-                      <a:noFill/>
-                    </a:lnT>
-                    <a:lnB algn="ctr">
+                    <a:lnL w="12700" algn="ctr">
+                      <a:noFill/>
+                    </a:lnL>
+                    <a:lnR w="12700" algn="ctr">
+                      <a:noFill/>
+                    </a:lnR>
+                    <a:lnT w="12700" algn="ctr">
+                      <a:noFill/>
+                    </a:lnT>
+                    <a:lnB w="12700" algn="ctr">
                       <a:noFill/>
                     </a:lnB>
                   </a:tcPr>
@@ -5261,16 +5261,16 @@
                     </a:p>
                   </a:txBody>
                   <a:tcPr marL="0" marR="0" marT="0" marB="0" anchor="b">
-                    <a:lnL algn="ctr">
-                      <a:noFill/>
-                    </a:lnL>
-                    <a:lnR algn="ctr">
-                      <a:noFill/>
-                    </a:lnR>
-                    <a:lnT algn="ctr">
-                      <a:noFill/>
-                    </a:lnT>
-                    <a:lnB algn="ctr">
+                    <a:lnL w="12700" algn="ctr">
+                      <a:noFill/>
+                    </a:lnL>
+                    <a:lnR w="12700" algn="ctr">
+                      <a:noFill/>
+                    </a:lnR>
+                    <a:lnT w="12700" algn="ctr">
+                      <a:noFill/>
+                    </a:lnT>
+                    <a:lnB w="12700" algn="ctr">
                       <a:noFill/>
                     </a:lnB>
                   </a:tcPr>
@@ -5286,16 +5286,16 @@
                     </a:p>
                   </a:txBody>
                   <a:tcPr marL="0" marR="0" marT="0" marB="0" anchor="b">
-                    <a:lnL algn="ctr">
-                      <a:noFill/>
-                    </a:lnL>
-                    <a:lnR algn="ctr">
-                      <a:noFill/>
-                    </a:lnR>
-                    <a:lnT algn="ctr">
-                      <a:noFill/>
-                    </a:lnT>
-                    <a:lnB algn="ctr">
+                    <a:lnL w="12700" algn="ctr">
+                      <a:noFill/>
+                    </a:lnL>
+                    <a:lnR w="12700" algn="ctr">
+                      <a:noFill/>
+                    </a:lnR>
+                    <a:lnT w="12700" algn="ctr">
+                      <a:noFill/>
+                    </a:lnT>
+                    <a:lnB w="12700" algn="ctr">
                       <a:noFill/>
                     </a:lnB>
                   </a:tcPr>
@@ -5333,16 +5333,16 @@
                     </a:p>
                   </a:txBody>
                   <a:tcPr marL="0" marR="0" marT="0" marB="0" anchor="b">
-                    <a:lnL algn="ctr">
-                      <a:noFill/>
-                    </a:lnL>
-                    <a:lnR algn="ctr">
-                      <a:noFill/>
-                    </a:lnR>
-                    <a:lnT algn="ctr">
-                      <a:noFill/>
-                    </a:lnT>
-                    <a:lnB algn="ctr">
+                    <a:lnL w="12700" algn="ctr">
+                      <a:noFill/>
+                    </a:lnL>
+                    <a:lnR w="12700" algn="ctr">
+                      <a:noFill/>
+                    </a:lnR>
+                    <a:lnT w="12700" algn="ctr">
+                      <a:noFill/>
+                    </a:lnT>
+                    <a:lnB w="12700" algn="ctr">
                       <a:noFill/>
                     </a:lnB>
                   </a:tcPr>
@@ -5375,16 +5375,16 @@
                     </a:p>
                   </a:txBody>
                   <a:tcPr marL="0" marR="0" marT="0" marB="0" anchor="b">
-                    <a:lnL algn="ctr">
-                      <a:noFill/>
-                    </a:lnL>
-                    <a:lnR algn="ctr">
-                      <a:noFill/>
-                    </a:lnR>
-                    <a:lnT algn="ctr">
-                      <a:noFill/>
-                    </a:lnT>
-                    <a:lnB algn="ctr">
+                    <a:lnL w="12700" algn="ctr">
+                      <a:noFill/>
+                    </a:lnL>
+                    <a:lnR w="12700" algn="ctr">
+                      <a:noFill/>
+                    </a:lnR>
+                    <a:lnT w="12700" algn="ctr">
+                      <a:noFill/>
+                    </a:lnT>
+                    <a:lnB w="12700" algn="ctr">
                       <a:noFill/>
                     </a:lnB>
                   </a:tcPr>
@@ -5411,16 +5411,16 @@
                     </a:p>
                   </a:txBody>
                   <a:tcPr marL="0" marR="0" marT="0" marB="0" anchor="b">
-                    <a:lnL algn="ctr">
-                      <a:noFill/>
-                    </a:lnL>
-                    <a:lnR algn="ctr">
-                      <a:noFill/>
-                    </a:lnR>
-                    <a:lnT algn="ctr">
-                      <a:noFill/>
-                    </a:lnT>
-                    <a:lnB algn="ctr">
+                    <a:lnL w="12700" algn="ctr">
+                      <a:noFill/>
+                    </a:lnL>
+                    <a:lnR w="12700" algn="ctr">
+                      <a:noFill/>
+                    </a:lnR>
+                    <a:lnT w="12700" algn="ctr">
+                      <a:noFill/>
+                    </a:lnT>
+                    <a:lnB w="12700" algn="ctr">
                       <a:noFill/>
                     </a:lnB>
                   </a:tcPr>
@@ -5447,16 +5447,16 @@
                     </a:p>
                   </a:txBody>
                   <a:tcPr marL="0" marR="0" marT="0" marB="0" anchor="b">
-                    <a:lnL algn="ctr">
-                      <a:noFill/>
-                    </a:lnL>
-                    <a:lnR algn="ctr">
-                      <a:noFill/>
-                    </a:lnR>
-                    <a:lnT algn="ctr">
-                      <a:noFill/>
-                    </a:lnT>
-                    <a:lnB algn="ctr">
+                    <a:lnL w="12700" algn="ctr">
+                      <a:noFill/>
+                    </a:lnL>
+                    <a:lnR w="12700" algn="ctr">
+                      <a:noFill/>
+                    </a:lnR>
+                    <a:lnT w="12700" algn="ctr">
+                      <a:noFill/>
+                    </a:lnT>
+                    <a:lnB w="12700" algn="ctr">
                       <a:noFill/>
                     </a:lnB>
                   </a:tcPr>
@@ -5472,16 +5472,16 @@
                     </a:p>
                   </a:txBody>
                   <a:tcPr marL="0" marR="0" marT="0" marB="0" anchor="b">
-                    <a:lnL algn="ctr">
-                      <a:noFill/>
-                    </a:lnL>
-                    <a:lnR algn="ctr">
-                      <a:noFill/>
-                    </a:lnR>
-                    <a:lnT algn="ctr">
-                      <a:noFill/>
-                    </a:lnT>
-                    <a:lnB algn="ctr">
+                    <a:lnL w="12700" algn="ctr">
+                      <a:noFill/>
+                    </a:lnL>
+                    <a:lnR w="12700" algn="ctr">
+                      <a:noFill/>
+                    </a:lnR>
+                    <a:lnT w="12700" algn="ctr">
+                      <a:noFill/>
+                    </a:lnT>
+                    <a:lnB w="12700" algn="ctr">
                       <a:noFill/>
                     </a:lnB>
                   </a:tcPr>
@@ -5519,16 +5519,16 @@
                     </a:p>
                   </a:txBody>
                   <a:tcPr marL="0" marR="0" marT="0" marB="0" anchor="b">
-                    <a:lnL algn="ctr">
-                      <a:noFill/>
-                    </a:lnL>
-                    <a:lnR algn="ctr">
-                      <a:noFill/>
-                    </a:lnR>
-                    <a:lnT algn="ctr">
-                      <a:noFill/>
-                    </a:lnT>
-                    <a:lnB algn="ctr">
+                    <a:lnL w="12700" algn="ctr">
+                      <a:noFill/>
+                    </a:lnL>
+                    <a:lnR w="12700" algn="ctr">
+                      <a:noFill/>
+                    </a:lnR>
+                    <a:lnT w="12700" algn="ctr">
+                      <a:noFill/>
+                    </a:lnT>
+                    <a:lnB w="12700" algn="ctr">
                       <a:noFill/>
                     </a:lnB>
                   </a:tcPr>
@@ -5544,16 +5544,16 @@
                     </a:p>
                   </a:txBody>
                   <a:tcPr marL="0" marR="0" marT="0" marB="0" anchor="b">
-                    <a:lnL algn="ctr">
-                      <a:noFill/>
-                    </a:lnL>
-                    <a:lnR algn="ctr">
-                      <a:noFill/>
-                    </a:lnR>
-                    <a:lnT algn="ctr">
-                      <a:noFill/>
-                    </a:lnT>
-                    <a:lnB algn="ctr">
+                    <a:lnL w="12700" algn="ctr">
+                      <a:noFill/>
+                    </a:lnL>
+                    <a:lnR w="12700" algn="ctr">
+                      <a:noFill/>
+                    </a:lnR>
+                    <a:lnT w="12700" algn="ctr">
+                      <a:noFill/>
+                    </a:lnT>
+                    <a:lnB w="12700" algn="ctr">
                       <a:noFill/>
                     </a:lnB>
                   </a:tcPr>
@@ -5591,16 +5591,16 @@
                     </a:p>
                   </a:txBody>
                   <a:tcPr marL="0" marR="0" marT="0" marB="0" anchor="b">
-                    <a:lnL algn="ctr">
-                      <a:noFill/>
-                    </a:lnL>
-                    <a:lnR algn="ctr">
-                      <a:noFill/>
-                    </a:lnR>
-                    <a:lnT algn="ctr">
-                      <a:noFill/>
-                    </a:lnT>
-                    <a:lnB algn="ctr">
+                    <a:lnL w="12700" algn="ctr">
+                      <a:noFill/>
+                    </a:lnL>
+                    <a:lnR w="12700" algn="ctr">
+                      <a:noFill/>
+                    </a:lnR>
+                    <a:lnT w="12700" algn="ctr">
+                      <a:noFill/>
+                    </a:lnT>
+                    <a:lnB w="12700" algn="ctr">
                       <a:noFill/>
                     </a:lnB>
                   </a:tcPr>
@@ -5633,16 +5633,16 @@
                     </a:p>
                   </a:txBody>
                   <a:tcPr marL="0" marR="0" marT="0" marB="0" anchor="b">
-                    <a:lnL algn="ctr">
-                      <a:noFill/>
-                    </a:lnL>
-                    <a:lnR algn="ctr">
-                      <a:noFill/>
-                    </a:lnR>
-                    <a:lnT algn="ctr">
-                      <a:noFill/>
-                    </a:lnT>
-                    <a:lnB algn="ctr">
+                    <a:lnL w="12700" algn="ctr">
+                      <a:noFill/>
+                    </a:lnL>
+                    <a:lnR w="12700" algn="ctr">
+                      <a:noFill/>
+                    </a:lnR>
+                    <a:lnT w="12700" algn="ctr">
+                      <a:noFill/>
+                    </a:lnT>
+                    <a:lnB w="12700" algn="ctr">
                       <a:noFill/>
                     </a:lnB>
                   </a:tcPr>
@@ -5669,16 +5669,16 @@
                     </a:p>
                   </a:txBody>
                   <a:tcPr marL="0" marR="0" marT="0" marB="0" anchor="b">
-                    <a:lnL algn="ctr">
-                      <a:noFill/>
-                    </a:lnL>
-                    <a:lnR algn="ctr">
-                      <a:noFill/>
-                    </a:lnR>
-                    <a:lnT algn="ctr">
-                      <a:noFill/>
-                    </a:lnT>
-                    <a:lnB algn="ctr">
+                    <a:lnL w="12700" algn="ctr">
+                      <a:noFill/>
+                    </a:lnL>
+                    <a:lnR w="12700" algn="ctr">
+                      <a:noFill/>
+                    </a:lnR>
+                    <a:lnT w="12700" algn="ctr">
+                      <a:noFill/>
+                    </a:lnT>
+                    <a:lnB w="12700" algn="ctr">
                       <a:noFill/>
                     </a:lnB>
                   </a:tcPr>
@@ -5705,16 +5705,16 @@
                     </a:p>
                   </a:txBody>
                   <a:tcPr marL="0" marR="0" marT="0" marB="0" anchor="b">
-                    <a:lnL algn="ctr">
-                      <a:noFill/>
-                    </a:lnL>
-                    <a:lnR algn="ctr">
-                      <a:noFill/>
-                    </a:lnR>
-                    <a:lnT algn="ctr">
-                      <a:noFill/>
-                    </a:lnT>
-                    <a:lnB algn="ctr">
+                    <a:lnL w="12700" algn="ctr">
+                      <a:noFill/>
+                    </a:lnL>
+                    <a:lnR w="12700" algn="ctr">
+                      <a:noFill/>
+                    </a:lnR>
+                    <a:lnT w="12700" algn="ctr">
+                      <a:noFill/>
+                    </a:lnT>
+                    <a:lnB w="12700" algn="ctr">
                       <a:noFill/>
                     </a:lnB>
                   </a:tcPr>
@@ -5730,16 +5730,16 @@
                     </a:p>
                   </a:txBody>
                   <a:tcPr marL="0" marR="0" marT="0" marB="0" anchor="b">
-                    <a:lnL algn="ctr">
-                      <a:noFill/>
-                    </a:lnL>
-                    <a:lnR algn="ctr">
-                      <a:noFill/>
-                    </a:lnR>
-                    <a:lnT algn="ctr">
-                      <a:noFill/>
-                    </a:lnT>
-                    <a:lnB algn="ctr">
+                    <a:lnL w="12700" algn="ctr">
+                      <a:noFill/>
+                    </a:lnL>
+                    <a:lnR w="12700" algn="ctr">
+                      <a:noFill/>
+                    </a:lnR>
+                    <a:lnT w="12700" algn="ctr">
+                      <a:noFill/>
+                    </a:lnT>
+                    <a:lnB w="12700" algn="ctr">
                       <a:noFill/>
                     </a:lnB>
                   </a:tcPr>
@@ -5777,16 +5777,16 @@
                     </a:p>
                   </a:txBody>
                   <a:tcPr marL="0" marR="0" marT="0" marB="0" anchor="b">
-                    <a:lnL algn="ctr">
-                      <a:noFill/>
-                    </a:lnL>
-                    <a:lnR algn="ctr">
-                      <a:noFill/>
-                    </a:lnR>
-                    <a:lnT algn="ctr">
-                      <a:noFill/>
-                    </a:lnT>
-                    <a:lnB algn="ctr">
+                    <a:lnL w="12700" algn="ctr">
+                      <a:noFill/>
+                    </a:lnL>
+                    <a:lnR w="12700" algn="ctr">
+                      <a:noFill/>
+                    </a:lnR>
+                    <a:lnT w="12700" algn="ctr">
+                      <a:noFill/>
+                    </a:lnT>
+                    <a:lnB w="12700" algn="ctr">
                       <a:noFill/>
                     </a:lnB>
                   </a:tcPr>
@@ -5802,16 +5802,16 @@
                     </a:p>
                   </a:txBody>
                   <a:tcPr marL="0" marR="0" marT="0" marB="0" anchor="b">
-                    <a:lnL algn="ctr">
-                      <a:noFill/>
-                    </a:lnL>
-                    <a:lnR algn="ctr">
-                      <a:noFill/>
-                    </a:lnR>
-                    <a:lnT algn="ctr">
-                      <a:noFill/>
-                    </a:lnT>
-                    <a:lnB algn="ctr">
+                    <a:lnL w="12700" algn="ctr">
+                      <a:noFill/>
+                    </a:lnL>
+                    <a:lnR w="12700" algn="ctr">
+                      <a:noFill/>
+                    </a:lnR>
+                    <a:lnT w="12700" algn="ctr">
+                      <a:noFill/>
+                    </a:lnT>
+                    <a:lnB w="12700" algn="ctr">
                       <a:noFill/>
                     </a:lnB>
                   </a:tcPr>
@@ -5849,16 +5849,16 @@
                     </a:p>
                   </a:txBody>
                   <a:tcPr marL="0" marR="0" marT="0" marB="0" anchor="b">
-                    <a:lnL algn="ctr">
-                      <a:noFill/>
-                    </a:lnL>
-                    <a:lnR algn="ctr">
-                      <a:noFill/>
-                    </a:lnR>
-                    <a:lnT algn="ctr">
-                      <a:noFill/>
-                    </a:lnT>
-                    <a:lnB algn="ctr">
+                    <a:lnL w="12700" algn="ctr">
+                      <a:noFill/>
+                    </a:lnL>
+                    <a:lnR w="12700" algn="ctr">
+                      <a:noFill/>
+                    </a:lnR>
+                    <a:lnT w="12700" algn="ctr">
+                      <a:noFill/>
+                    </a:lnT>
+                    <a:lnB w="12700" algn="ctr">
                       <a:noFill/>
                     </a:lnB>
                   </a:tcPr>
@@ -5891,16 +5891,16 @@
                     </a:p>
                   </a:txBody>
                   <a:tcPr marL="0" marR="0" marT="0" marB="0" anchor="b">
-                    <a:lnL algn="ctr">
-                      <a:noFill/>
-                    </a:lnL>
-                    <a:lnR algn="ctr">
-                      <a:noFill/>
-                    </a:lnR>
-                    <a:lnT algn="ctr">
-                      <a:noFill/>
-                    </a:lnT>
-                    <a:lnB algn="ctr">
+                    <a:lnL w="12700" algn="ctr">
+                      <a:noFill/>
+                    </a:lnL>
+                    <a:lnR w="12700" algn="ctr">
+                      <a:noFill/>
+                    </a:lnR>
+                    <a:lnT w="12700" algn="ctr">
+                      <a:noFill/>
+                    </a:lnT>
+                    <a:lnB w="12700" algn="ctr">
                       <a:noFill/>
                     </a:lnB>
                   </a:tcPr>
@@ -5927,16 +5927,16 @@
                     </a:p>
                   </a:txBody>
                   <a:tcPr marL="0" marR="0" marT="0" marB="0" anchor="b">
-                    <a:lnL algn="ctr">
-                      <a:noFill/>
-                    </a:lnL>
-                    <a:lnR algn="ctr">
-                      <a:noFill/>
-                    </a:lnR>
-                    <a:lnT algn="ctr">
-                      <a:noFill/>
-                    </a:lnT>
-                    <a:lnB algn="ctr">
+                    <a:lnL w="12700" algn="ctr">
+                      <a:noFill/>
+                    </a:lnL>
+                    <a:lnR w="12700" algn="ctr">
+                      <a:noFill/>
+                    </a:lnR>
+                    <a:lnT w="12700" algn="ctr">
+                      <a:noFill/>
+                    </a:lnT>
+                    <a:lnB w="12700" algn="ctr">
                       <a:noFill/>
                     </a:lnB>
                   </a:tcPr>
@@ -5963,16 +5963,16 @@
                     </a:p>
                   </a:txBody>
                   <a:tcPr marL="0" marR="0" marT="0" marB="0" anchor="b">
-                    <a:lnL algn="ctr">
-                      <a:noFill/>
-                    </a:lnL>
-                    <a:lnR algn="ctr">
-                      <a:noFill/>
-                    </a:lnR>
-                    <a:lnT algn="ctr">
-                      <a:noFill/>
-                    </a:lnT>
-                    <a:lnB algn="ctr">
+                    <a:lnL w="12700" algn="ctr">
+                      <a:noFill/>
+                    </a:lnL>
+                    <a:lnR w="12700" algn="ctr">
+                      <a:noFill/>
+                    </a:lnR>
+                    <a:lnT w="12700" algn="ctr">
+                      <a:noFill/>
+                    </a:lnT>
+                    <a:lnB w="12700" algn="ctr">
                       <a:noFill/>
                     </a:lnB>
                   </a:tcPr>
@@ -5988,16 +5988,16 @@
                     </a:p>
                   </a:txBody>
                   <a:tcPr marL="0" marR="0" marT="0" marB="0" anchor="b">
-                    <a:lnL algn="ctr">
-                      <a:noFill/>
-                    </a:lnL>
-                    <a:lnR algn="ctr">
-                      <a:noFill/>
-                    </a:lnR>
-                    <a:lnT algn="ctr">
-                      <a:noFill/>
-                    </a:lnT>
-                    <a:lnB algn="ctr">
+                    <a:lnL w="12700" algn="ctr">
+                      <a:noFill/>
+                    </a:lnL>
+                    <a:lnR w="12700" algn="ctr">
+                      <a:noFill/>
+                    </a:lnR>
+                    <a:lnT w="12700" algn="ctr">
+                      <a:noFill/>
+                    </a:lnT>
+                    <a:lnB w="12700" algn="ctr">
                       <a:noFill/>
                     </a:lnB>
                   </a:tcPr>
@@ -6035,16 +6035,16 @@
                     </a:p>
                   </a:txBody>
                   <a:tcPr marL="0" marR="0" marT="0" marB="0" anchor="b">
-                    <a:lnL algn="ctr">
-                      <a:noFill/>
-                    </a:lnL>
-                    <a:lnR algn="ctr">
-                      <a:noFill/>
-                    </a:lnR>
-                    <a:lnT algn="ctr">
-                      <a:noFill/>
-                    </a:lnT>
-                    <a:lnB algn="ctr">
+                    <a:lnL w="12700" algn="ctr">
+                      <a:noFill/>
+                    </a:lnL>
+                    <a:lnR w="12700" algn="ctr">
+                      <a:noFill/>
+                    </a:lnR>
+                    <a:lnT w="12700" algn="ctr">
+                      <a:noFill/>
+                    </a:lnT>
+                    <a:lnB w="12700" algn="ctr">
                       <a:noFill/>
                     </a:lnB>
                   </a:tcPr>
@@ -6060,16 +6060,16 @@
                     </a:p>
                   </a:txBody>
                   <a:tcPr marL="0" marR="0" marT="0" marB="0" anchor="b">
-                    <a:lnL algn="ctr">
-                      <a:noFill/>
-                    </a:lnL>
-                    <a:lnR algn="ctr">
-                      <a:noFill/>
-                    </a:lnR>
-                    <a:lnT algn="ctr">
-                      <a:noFill/>
-                    </a:lnT>
-                    <a:lnB algn="ctr">
+                    <a:lnL w="12700" algn="ctr">
+                      <a:noFill/>
+                    </a:lnL>
+                    <a:lnR w="12700" algn="ctr">
+                      <a:noFill/>
+                    </a:lnR>
+                    <a:lnT w="12700" algn="ctr">
+                      <a:noFill/>
+                    </a:lnT>
+                    <a:lnB w="12700" algn="ctr">
                       <a:noFill/>
                     </a:lnB>
                   </a:tcPr>
@@ -6107,16 +6107,16 @@
                     </a:p>
                   </a:txBody>
                   <a:tcPr marL="0" marR="0" marT="0" marB="0" anchor="b">
-                    <a:lnL algn="ctr">
-                      <a:noFill/>
-                    </a:lnL>
-                    <a:lnR algn="ctr">
-                      <a:noFill/>
-                    </a:lnR>
-                    <a:lnT algn="ctr">
-                      <a:noFill/>
-                    </a:lnT>
-                    <a:lnB algn="ctr">
+                    <a:lnL w="12700" algn="ctr">
+                      <a:noFill/>
+                    </a:lnL>
+                    <a:lnR w="12700" algn="ctr">
+                      <a:noFill/>
+                    </a:lnR>
+                    <a:lnT w="12700" algn="ctr">
+                      <a:noFill/>
+                    </a:lnT>
+                    <a:lnB w="12700" algn="ctr">
                       <a:noFill/>
                     </a:lnB>
                   </a:tcPr>
@@ -6168,7 +6168,7 @@
       </p:grpSpPr>
       <p:sp>
         <p:nvSpPr>
-          <p:cNvPr id="2008072906" name="Text 0"/>
+          <p:cNvPr id="1537731743" name="Text 0"/>
           <p:cNvSpPr/>
           <p:nvPr/>
         </p:nvSpPr>
@@ -6215,7 +6215,7 @@
       </p:sp>
       <p:sp>
         <p:nvSpPr>
-          <p:cNvPr id="643293816" name="Text 1"/>
+          <p:cNvPr id="717088231" name="Text 1"/>
           <p:cNvSpPr/>
           <p:nvPr/>
         </p:nvSpPr>
@@ -7011,7 +7011,7 @@
       </p:grpSpPr>
       <p:sp>
         <p:nvSpPr>
-          <p:cNvPr id="1825051222" name="Text 0"/>
+          <p:cNvPr id="1569072146" name="Text 0"/>
           <p:cNvSpPr/>
           <p:nvPr/>
         </p:nvSpPr>
@@ -7058,7 +7058,7 @@
       </p:sp>
       <p:sp>
         <p:nvSpPr>
-          <p:cNvPr id="901637983" name="Text 1"/>
+          <p:cNvPr id="220742209" name="Text 1"/>
           <p:cNvSpPr/>
           <p:nvPr/>
         </p:nvSpPr>
@@ -7824,7 +7824,7 @@
       </p:grpSpPr>
       <p:sp>
         <p:nvSpPr>
-          <p:cNvPr id="254123099" name="Text 0"/>
+          <p:cNvPr id="1365331173" name="Text 0"/>
           <p:cNvSpPr/>
           <p:nvPr/>
         </p:nvSpPr>
@@ -7867,7 +7867,7 @@
       </p:sp>
       <p:sp>
         <p:nvSpPr>
-          <p:cNvPr id="1097514087" name="Text 1"/>
+          <p:cNvPr id="451110093" name="Text 1"/>
           <p:cNvSpPr/>
           <p:nvPr/>
         </p:nvSpPr>
@@ -7994,7 +7994,7 @@
       </p:sp>
       <p:sp>
         <p:nvSpPr>
-          <p:cNvPr id="1608069344" name="Text 0"/>
+          <p:cNvPr id="2035573922" name="Text 0"/>
           <p:cNvSpPr/>
           <p:nvPr/>
         </p:nvSpPr>
@@ -8037,7 +8037,7 @@
       </p:sp>
       <p:sp>
         <p:nvSpPr>
-          <p:cNvPr id="641864039" name="Text 1"/>
+          <p:cNvPr id="1870293022" name="Text 1"/>
           <p:cNvSpPr/>
           <p:nvPr/>
         </p:nvSpPr>
@@ -8256,7 +8256,7 @@
       </p:grpSpPr>
       <p:sp>
         <p:nvSpPr>
-          <p:cNvPr id="1122319567" name="Text 0"/>
+          <p:cNvPr id="2082493107" name="Text 0"/>
           <p:cNvSpPr/>
           <p:nvPr/>
         </p:nvSpPr>
@@ -8296,7 +8296,7 @@
       </p:sp>
       <p:sp>
         <p:nvSpPr>
-          <p:cNvPr id="2128850733" name="Text 1"/>
+          <p:cNvPr id="2029690768" name="Text 1"/>
           <p:cNvSpPr/>
           <p:nvPr/>
         </p:nvSpPr>
@@ -8339,7 +8339,7 @@
       </p:sp>
       <p:sp>
         <p:nvSpPr>
-          <p:cNvPr id="1936409185" name="Text 3"/>
+          <p:cNvPr id="1195969014" name="Text 3"/>
           <p:cNvSpPr/>
           <p:nvPr/>
         </p:nvSpPr>
@@ -9444,7 +9444,7 @@
       </p:grpSpPr>
       <p:sp>
         <p:nvSpPr>
-          <p:cNvPr id="1197524939" name="Text 1"/>
+          <p:cNvPr id="1209436882" name="Text 1"/>
           <p:cNvSpPr/>
           <p:nvPr/>
         </p:nvSpPr>
@@ -9487,7 +9487,7 @@
       </p:sp>
       <p:sp>
         <p:nvSpPr>
-          <p:cNvPr id="470974369" name="Text 2"/>
+          <p:cNvPr id="286120685" name="Text 2"/>
           <p:cNvSpPr/>
           <p:nvPr/>
         </p:nvSpPr>
@@ -9540,7 +9540,7 @@
       </p:sp>
       <p:sp>
         <p:nvSpPr>
-          <p:cNvPr id="1265272235" name="Text 3"/>
+          <p:cNvPr id="1694119709" name="Text 3"/>
           <p:cNvSpPr/>
           <p:nvPr/>
         </p:nvSpPr>
@@ -9606,7 +9606,7 @@
                 <a:ea typeface="Arial"/>
                 <a:cs typeface="Arial"/>
               </a:rPr>
-              <a:t>	Es. Vendo 9 EURC per 9 EUR con fee 1 EURC</a:t>
+              <a:t>	Es. Vendo 10 EURC per 9 EUR con fee 1 EURC</a:t>
             </a:r>
             <a:endParaRPr lang="en-US" sz="1350">
               <a:solidFill>
@@ -9685,7 +9685,7 @@
                 <a:ea typeface="Arial"/>
                 <a:cs typeface="Arial"/>
               </a:rPr>
-              <a:t>	Es. Vendo 10 EURC per 10 EUR con fee 1 EURC</a:t>
+              <a:t>	Es. Vendo 10 EURC per 10 EUR con fee 1 EUR</a:t>
             </a:r>
             <a:endParaRPr lang="en-US" sz="1350">
               <a:solidFill>
@@ -9785,7 +9785,7 @@
                 <a:ea typeface="Arial"/>
                 <a:cs typeface="Arial"/>
               </a:rPr>
-              <a:t>	Es. Venfo 10 EURC per 10 EUR fee 0.0001 ETH</a:t>
+              <a:t>	Es. Vendo 10 EURC per 10 EUR fee 0.0001 ETH</a:t>
             </a:r>
             <a:endParaRPr lang="en-US" sz="1350"/>
           </a:p>
@@ -9833,7 +9833,7 @@
       </p:grpSpPr>
       <p:sp>
         <p:nvSpPr>
-          <p:cNvPr id="400125431" name="Text 1"/>
+          <p:cNvPr id="864502644" name="Text 1"/>
           <p:cNvSpPr/>
           <p:nvPr/>
         </p:nvSpPr>
@@ -9876,7 +9876,7 @@
       </p:sp>
       <p:sp>
         <p:nvSpPr>
-          <p:cNvPr id="1777077419" name="Text 3"/>
+          <p:cNvPr id="57490102" name="Text 3"/>
           <p:cNvSpPr/>
           <p:nvPr/>
         </p:nvSpPr>
@@ -10484,7 +10484,7 @@
       </p:grpSpPr>
       <p:sp>
         <p:nvSpPr>
-          <p:cNvPr id="372422689" name="Text 1"/>
+          <p:cNvPr id="1130728202" name="Text 1"/>
           <p:cNvSpPr/>
           <p:nvPr/>
         </p:nvSpPr>
@@ -10527,7 +10527,7 @@
       </p:sp>
       <p:sp>
         <p:nvSpPr>
-          <p:cNvPr id="743428560" name="Text 3"/>
+          <p:cNvPr id="198678623" name="Text 3"/>
           <p:cNvSpPr/>
           <p:nvPr/>
         </p:nvSpPr>
@@ -11051,7 +11051,7 @@
       </p:grpSpPr>
       <p:sp>
         <p:nvSpPr>
-          <p:cNvPr id="2034047047" name="Text 1"/>
+          <p:cNvPr id="1409451478" name="Text 1"/>
           <p:cNvSpPr/>
           <p:nvPr/>
         </p:nvSpPr>
@@ -11094,7 +11094,7 @@
       </p:sp>
       <p:sp>
         <p:nvSpPr>
-          <p:cNvPr id="975991941" name="Text 3"/>
+          <p:cNvPr id="2018475077" name="Text 3"/>
           <p:cNvSpPr/>
           <p:nvPr/>
         </p:nvSpPr>
@@ -11597,7 +11597,7 @@
       </p:grpSpPr>
       <p:sp>
         <p:nvSpPr>
-          <p:cNvPr id="1878307411" name="Text 0"/>
+          <p:cNvPr id="479935957" name="Text 0"/>
           <p:cNvSpPr/>
           <p:nvPr/>
         </p:nvSpPr>
@@ -11640,7 +11640,7 @@
       </p:sp>
       <p:sp>
         <p:nvSpPr>
-          <p:cNvPr id="625220048" name="Text 1"/>
+          <p:cNvPr id="966709026" name="Text 1"/>
           <p:cNvSpPr/>
           <p:nvPr/>
         </p:nvSpPr>
@@ -11947,7 +11947,7 @@
       </p:grpSpPr>
       <p:sp>
         <p:nvSpPr>
-          <p:cNvPr id="1583830194" name="Text 0"/>
+          <p:cNvPr id="838879336" name="Text 0"/>
           <p:cNvSpPr/>
           <p:nvPr/>
         </p:nvSpPr>
@@ -11990,7 +11990,7 @@
       </p:sp>
       <p:sp>
         <p:nvSpPr>
-          <p:cNvPr id="1064826255" name="Text 1"/>
+          <p:cNvPr id="88133839" name="Text 1"/>
           <p:cNvSpPr/>
           <p:nvPr/>
         </p:nvSpPr>
@@ -12104,7 +12104,7 @@
       </p:sp>
       <p:graphicFrame>
         <p:nvGraphicFramePr>
-          <p:cNvPr id="320600119" name=""/>
+          <p:cNvPr id="693731435" name=""/>
           <p:cNvGraphicFramePr>
             <a:graphicFrameLocks xmlns:a="http://schemas.openxmlformats.org/drawingml/2006/main"/>
           </p:cNvGraphicFramePr>

--- a/Documentazione/Gestione delle fee.pptx
+++ b/Documentazione/Gestione delle fee.pptx
@@ -144,7 +144,7 @@
       </p:grpSpPr>
       <p:sp>
         <p:nvSpPr>
-          <p:cNvPr id="686372268" name="Header Placeholder 1"/>
+          <p:cNvPr id="38069723" name="Header Placeholder 1"/>
           <p:cNvSpPr>
             <a:spLocks noGrp="1"/>
           </p:cNvSpPr>
@@ -178,7 +178,7 @@
       </p:sp>
       <p:sp>
         <p:nvSpPr>
-          <p:cNvPr id="1951050847" name="Date Placeholder 2"/>
+          <p:cNvPr id="759578210" name="Date Placeholder 2"/>
           <p:cNvSpPr>
             <a:spLocks noGrp="1"/>
           </p:cNvSpPr>
@@ -216,7 +216,7 @@
       </p:sp>
       <p:sp>
         <p:nvSpPr>
-          <p:cNvPr id="475053476" name="Slide Image Placeholder 3"/>
+          <p:cNvPr id="1394507042" name="Slide Image Placeholder 3"/>
           <p:cNvSpPr>
             <a:spLocks noChangeAspect="1" noGrp="1" noRot="1"/>
           </p:cNvSpPr>
@@ -252,7 +252,7 @@
       </p:sp>
       <p:sp>
         <p:nvSpPr>
-          <p:cNvPr id="850065221" name="Notes Placeholder 4"/>
+          <p:cNvPr id="1004716095" name="Notes Placeholder 4"/>
           <p:cNvSpPr>
             <a:spLocks noGrp="1"/>
           </p:cNvSpPr>
@@ -326,7 +326,7 @@
       </p:sp>
       <p:sp>
         <p:nvSpPr>
-          <p:cNvPr id="1005647765" name="Footer Placeholder 5"/>
+          <p:cNvPr id="2141975956" name="Footer Placeholder 5"/>
           <p:cNvSpPr>
             <a:spLocks noGrp="1"/>
           </p:cNvSpPr>
@@ -360,7 +360,7 @@
       </p:sp>
       <p:sp>
         <p:nvSpPr>
-          <p:cNvPr id="341340722" name="Slide Number Placeholder 6"/>
+          <p:cNvPr id="1776653536" name="Slide Number Placeholder 6"/>
           <p:cNvSpPr>
             <a:spLocks noGrp="1"/>
           </p:cNvSpPr>
@@ -513,7 +513,7 @@
       </p:grpSpPr>
       <p:sp>
         <p:nvSpPr>
-          <p:cNvPr id="651881179" name="Slide Image Placeholder 1"/>
+          <p:cNvPr id="1601040738" name="Slide Image Placeholder 1"/>
           <p:cNvSpPr>
             <a:spLocks noChangeAspect="1" noGrp="1" noRot="1"/>
           </p:cNvSpPr>
@@ -525,7 +525,7 @@
       </p:sp>
       <p:sp>
         <p:nvSpPr>
-          <p:cNvPr id="1876890747" name="Notes Placeholder 2"/>
+          <p:cNvPr id="1295000311" name="Notes Placeholder 2"/>
           <p:cNvSpPr>
             <a:spLocks noGrp="1"/>
           </p:cNvSpPr>
@@ -547,7 +547,7 @@
       </p:sp>
       <p:sp>
         <p:nvSpPr>
-          <p:cNvPr id="1929216184" name="Slide Number Placeholder 3"/>
+          <p:cNvPr id="1579041043" name="Slide Number Placeholder 3"/>
           <p:cNvSpPr>
             <a:spLocks noGrp="1"/>
           </p:cNvSpPr>
@@ -598,7 +598,7 @@
       </p:grpSpPr>
       <p:sp>
         <p:nvSpPr>
-          <p:cNvPr id="353036661" name="Slide Image Placeholder 1"/>
+          <p:cNvPr id="2090688075" name="Slide Image Placeholder 1"/>
           <p:cNvSpPr>
             <a:spLocks noChangeAspect="1" noGrp="1" noRot="1"/>
           </p:cNvSpPr>
@@ -610,7 +610,7 @@
       </p:sp>
       <p:sp>
         <p:nvSpPr>
-          <p:cNvPr id="1403395800" name="Notes Placeholder 2"/>
+          <p:cNvPr id="1899585944" name="Notes Placeholder 2"/>
           <p:cNvSpPr>
             <a:spLocks noGrp="1"/>
           </p:cNvSpPr>
@@ -632,7 +632,7 @@
       </p:sp>
       <p:sp>
         <p:nvSpPr>
-          <p:cNvPr id="1453951319" name="Slide Number Placeholder 3"/>
+          <p:cNvPr id="22842307" name="Slide Number Placeholder 3"/>
           <p:cNvSpPr>
             <a:spLocks noGrp="1"/>
           </p:cNvSpPr>
@@ -683,7 +683,7 @@
       </p:grpSpPr>
       <p:sp>
         <p:nvSpPr>
-          <p:cNvPr id="696506058" name="Slide Image Placeholder 1"/>
+          <p:cNvPr id="1879794594" name="Slide Image Placeholder 1"/>
           <p:cNvSpPr>
             <a:spLocks noChangeAspect="1" noGrp="1" noRot="1"/>
           </p:cNvSpPr>
@@ -695,7 +695,7 @@
       </p:sp>
       <p:sp>
         <p:nvSpPr>
-          <p:cNvPr id="891818959" name="Notes Placeholder 2"/>
+          <p:cNvPr id="1596927440" name="Notes Placeholder 2"/>
           <p:cNvSpPr>
             <a:spLocks noGrp="1"/>
           </p:cNvSpPr>
@@ -717,7 +717,7 @@
       </p:sp>
       <p:sp>
         <p:nvSpPr>
-          <p:cNvPr id="862016513" name="Slide Number Placeholder 3"/>
+          <p:cNvPr id="811162515" name="Slide Number Placeholder 3"/>
           <p:cNvSpPr>
             <a:spLocks noGrp="1"/>
           </p:cNvSpPr>
@@ -768,7 +768,7 @@
       </p:grpSpPr>
       <p:sp>
         <p:nvSpPr>
-          <p:cNvPr id="629465915" name="Slide Image Placeholder 1"/>
+          <p:cNvPr id="2077347746" name="Slide Image Placeholder 1"/>
           <p:cNvSpPr>
             <a:spLocks noChangeAspect="1" noGrp="1" noRot="1"/>
           </p:cNvSpPr>
@@ -780,7 +780,7 @@
       </p:sp>
       <p:sp>
         <p:nvSpPr>
-          <p:cNvPr id="395517363" name="Notes Placeholder 2"/>
+          <p:cNvPr id="5486260" name="Notes Placeholder 2"/>
           <p:cNvSpPr>
             <a:spLocks noGrp="1"/>
           </p:cNvSpPr>
@@ -802,7 +802,7 @@
       </p:sp>
       <p:sp>
         <p:nvSpPr>
-          <p:cNvPr id="2016120103" name="Slide Number Placeholder 3"/>
+          <p:cNvPr id="939496748" name="Slide Number Placeholder 3"/>
           <p:cNvSpPr>
             <a:spLocks noGrp="1"/>
           </p:cNvSpPr>
@@ -853,7 +853,7 @@
       </p:grpSpPr>
       <p:sp>
         <p:nvSpPr>
-          <p:cNvPr id="1049399034" name="Slide Image Placeholder 1"/>
+          <p:cNvPr id="1529628583" name="Slide Image Placeholder 1"/>
           <p:cNvSpPr>
             <a:spLocks noChangeAspect="1" noGrp="1" noRot="1"/>
           </p:cNvSpPr>
@@ -865,7 +865,7 @@
       </p:sp>
       <p:sp>
         <p:nvSpPr>
-          <p:cNvPr id="1325944461" name="Notes Placeholder 2"/>
+          <p:cNvPr id="1142757865" name="Notes Placeholder 2"/>
           <p:cNvSpPr>
             <a:spLocks noGrp="1"/>
           </p:cNvSpPr>
@@ -887,7 +887,7 @@
       </p:sp>
       <p:sp>
         <p:nvSpPr>
-          <p:cNvPr id="1951162000" name="Slide Number Placeholder 3"/>
+          <p:cNvPr id="1353537421" name="Slide Number Placeholder 3"/>
           <p:cNvSpPr>
             <a:spLocks noGrp="1"/>
           </p:cNvSpPr>
@@ -938,7 +938,7 @@
       </p:grpSpPr>
       <p:sp>
         <p:nvSpPr>
-          <p:cNvPr id="120895684" name="Slide Image Placeholder 1"/>
+          <p:cNvPr id="1760549493" name="Slide Image Placeholder 1"/>
           <p:cNvSpPr>
             <a:spLocks noChangeAspect="1" noGrp="1" noRot="1"/>
           </p:cNvSpPr>
@@ -950,7 +950,7 @@
       </p:sp>
       <p:sp>
         <p:nvSpPr>
-          <p:cNvPr id="1118052031" name="Notes Placeholder 2"/>
+          <p:cNvPr id="181589124" name="Notes Placeholder 2"/>
           <p:cNvSpPr>
             <a:spLocks noGrp="1"/>
           </p:cNvSpPr>
@@ -972,7 +972,7 @@
       </p:sp>
       <p:sp>
         <p:nvSpPr>
-          <p:cNvPr id="45648253" name="Slide Number Placeholder 3"/>
+          <p:cNvPr id="1766910588" name="Slide Number Placeholder 3"/>
           <p:cNvSpPr>
             <a:spLocks noGrp="1"/>
           </p:cNvSpPr>
@@ -1023,7 +1023,7 @@
       </p:grpSpPr>
       <p:sp>
         <p:nvSpPr>
-          <p:cNvPr id="791757382" name="Slide Image Placeholder 1"/>
+          <p:cNvPr id="277555206" name="Slide Image Placeholder 1"/>
           <p:cNvSpPr>
             <a:spLocks noChangeAspect="1" noGrp="1" noRot="1"/>
           </p:cNvSpPr>
@@ -1035,7 +1035,7 @@
       </p:sp>
       <p:sp>
         <p:nvSpPr>
-          <p:cNvPr id="1663070032" name="Notes Placeholder 2"/>
+          <p:cNvPr id="778617776" name="Notes Placeholder 2"/>
           <p:cNvSpPr>
             <a:spLocks noGrp="1"/>
           </p:cNvSpPr>
@@ -1057,7 +1057,7 @@
       </p:sp>
       <p:sp>
         <p:nvSpPr>
-          <p:cNvPr id="135596886" name="Slide Number Placeholder 3"/>
+          <p:cNvPr id="1696379121" name="Slide Number Placeholder 3"/>
           <p:cNvSpPr>
             <a:spLocks noGrp="1"/>
           </p:cNvSpPr>
@@ -1108,7 +1108,7 @@
       </p:grpSpPr>
       <p:sp>
         <p:nvSpPr>
-          <p:cNvPr id="1099109069" name="Slide Image Placeholder 1"/>
+          <p:cNvPr id="685459541" name="Slide Image Placeholder 1"/>
           <p:cNvSpPr>
             <a:spLocks noChangeAspect="1" noGrp="1" noRot="1"/>
           </p:cNvSpPr>
@@ -1120,7 +1120,7 @@
       </p:sp>
       <p:sp>
         <p:nvSpPr>
-          <p:cNvPr id="2035724354" name="Notes Placeholder 2"/>
+          <p:cNvPr id="1486323443" name="Notes Placeholder 2"/>
           <p:cNvSpPr>
             <a:spLocks noGrp="1"/>
           </p:cNvSpPr>
@@ -1142,7 +1142,7 @@
       </p:sp>
       <p:sp>
         <p:nvSpPr>
-          <p:cNvPr id="1208382893" name="Slide Number Placeholder 3"/>
+          <p:cNvPr id="1408749275" name="Slide Number Placeholder 3"/>
           <p:cNvSpPr>
             <a:spLocks noGrp="1"/>
           </p:cNvSpPr>
@@ -1193,7 +1193,7 @@
       </p:grpSpPr>
       <p:sp>
         <p:nvSpPr>
-          <p:cNvPr id="17704489" name="Slide Image Placeholder 1"/>
+          <p:cNvPr id="353598643" name="Slide Image Placeholder 1"/>
           <p:cNvSpPr>
             <a:spLocks noChangeAspect="1" noGrp="1" noRot="1"/>
           </p:cNvSpPr>
@@ -1205,7 +1205,7 @@
       </p:sp>
       <p:sp>
         <p:nvSpPr>
-          <p:cNvPr id="75234460" name="Notes Placeholder 2"/>
+          <p:cNvPr id="365097282" name="Notes Placeholder 2"/>
           <p:cNvSpPr>
             <a:spLocks noGrp="1"/>
           </p:cNvSpPr>
@@ -1227,7 +1227,7 @@
       </p:sp>
       <p:sp>
         <p:nvSpPr>
-          <p:cNvPr id="1587687354" name="Slide Number Placeholder 3"/>
+          <p:cNvPr id="108937872" name="Slide Number Placeholder 3"/>
           <p:cNvSpPr>
             <a:spLocks noGrp="1"/>
           </p:cNvSpPr>
@@ -1278,7 +1278,7 @@
       </p:grpSpPr>
       <p:sp>
         <p:nvSpPr>
-          <p:cNvPr id="1472975229" name="Slide Image Placeholder 1"/>
+          <p:cNvPr id="823222523" name="Slide Image Placeholder 1"/>
           <p:cNvSpPr>
             <a:spLocks noChangeAspect="1" noGrp="1" noRot="1"/>
           </p:cNvSpPr>
@@ -1290,7 +1290,7 @@
       </p:sp>
       <p:sp>
         <p:nvSpPr>
-          <p:cNvPr id="817124457" name="Notes Placeholder 2"/>
+          <p:cNvPr id="1502878955" name="Notes Placeholder 2"/>
           <p:cNvSpPr>
             <a:spLocks noGrp="1"/>
           </p:cNvSpPr>
@@ -1312,7 +1312,7 @@
       </p:sp>
       <p:sp>
         <p:nvSpPr>
-          <p:cNvPr id="198112672" name="Slide Number Placeholder 3"/>
+          <p:cNvPr id="978960011" name="Slide Number Placeholder 3"/>
           <p:cNvSpPr>
             <a:spLocks noGrp="1"/>
           </p:cNvSpPr>
@@ -1363,7 +1363,7 @@
       </p:grpSpPr>
       <p:sp>
         <p:nvSpPr>
-          <p:cNvPr id="693735453" name="Slide Image Placeholder 1"/>
+          <p:cNvPr id="2146476820" name="Slide Image Placeholder 1"/>
           <p:cNvSpPr>
             <a:spLocks noChangeAspect="1" noGrp="1" noRot="1"/>
           </p:cNvSpPr>
@@ -1375,7 +1375,7 @@
       </p:sp>
       <p:sp>
         <p:nvSpPr>
-          <p:cNvPr id="80478449" name="Notes Placeholder 2"/>
+          <p:cNvPr id="136648127" name="Notes Placeholder 2"/>
           <p:cNvSpPr>
             <a:spLocks noGrp="1"/>
           </p:cNvSpPr>
@@ -1397,7 +1397,7 @@
       </p:sp>
       <p:sp>
         <p:nvSpPr>
-          <p:cNvPr id="722168099" name="Slide Number Placeholder 3"/>
+          <p:cNvPr id="1084450201" name="Slide Number Placeholder 3"/>
           <p:cNvSpPr>
             <a:spLocks noGrp="1"/>
           </p:cNvSpPr>
@@ -1448,7 +1448,7 @@
       </p:grpSpPr>
       <p:sp>
         <p:nvSpPr>
-          <p:cNvPr id="719132900" name="Slide Image Placeholder 1"/>
+          <p:cNvPr id="1334879135" name="Slide Image Placeholder 1"/>
           <p:cNvSpPr>
             <a:spLocks noChangeAspect="1" noGrp="1" noRot="1"/>
           </p:cNvSpPr>
@@ -1460,7 +1460,7 @@
       </p:sp>
       <p:sp>
         <p:nvSpPr>
-          <p:cNvPr id="1786937034" name="Notes Placeholder 2"/>
+          <p:cNvPr id="1733819898" name="Notes Placeholder 2"/>
           <p:cNvSpPr>
             <a:spLocks noGrp="1"/>
           </p:cNvSpPr>
@@ -1482,7 +1482,7 @@
       </p:sp>
       <p:sp>
         <p:nvSpPr>
-          <p:cNvPr id="1683585698" name="Slide Number Placeholder 3"/>
+          <p:cNvPr id="1738023333" name="Slide Number Placeholder 3"/>
           <p:cNvSpPr>
             <a:spLocks noGrp="1"/>
           </p:cNvSpPr>
@@ -1533,7 +1533,7 @@
       </p:grpSpPr>
       <p:sp>
         <p:nvSpPr>
-          <p:cNvPr id="233044781" name="Slide Image Placeholder 1"/>
+          <p:cNvPr id="1108546354" name="Slide Image Placeholder 1"/>
           <p:cNvSpPr>
             <a:spLocks noChangeAspect="1" noGrp="1" noRot="1"/>
           </p:cNvSpPr>
@@ -1545,7 +1545,7 @@
       </p:sp>
       <p:sp>
         <p:nvSpPr>
-          <p:cNvPr id="915362952" name="Notes Placeholder 2"/>
+          <p:cNvPr id="346710765" name="Notes Placeholder 2"/>
           <p:cNvSpPr>
             <a:spLocks noGrp="1"/>
           </p:cNvSpPr>
@@ -1567,7 +1567,7 @@
       </p:sp>
       <p:sp>
         <p:nvSpPr>
-          <p:cNvPr id="24413795" name="Slide Number Placeholder 3"/>
+          <p:cNvPr id="543475726" name="Slide Number Placeholder 3"/>
           <p:cNvSpPr>
             <a:spLocks noGrp="1"/>
           </p:cNvSpPr>
@@ -1618,7 +1618,7 @@
       </p:grpSpPr>
       <p:sp>
         <p:nvSpPr>
-          <p:cNvPr id="2137876218" name="Slide Image Placeholder 1"/>
+          <p:cNvPr id="561425526" name="Slide Image Placeholder 1"/>
           <p:cNvSpPr>
             <a:spLocks noChangeAspect="1" noGrp="1" noRot="1"/>
           </p:cNvSpPr>
@@ -1630,7 +1630,7 @@
       </p:sp>
       <p:sp>
         <p:nvSpPr>
-          <p:cNvPr id="1064279161" name="Notes Placeholder 2"/>
+          <p:cNvPr id="386236229" name="Notes Placeholder 2"/>
           <p:cNvSpPr>
             <a:spLocks noGrp="1"/>
           </p:cNvSpPr>
@@ -1652,7 +1652,7 @@
       </p:sp>
       <p:sp>
         <p:nvSpPr>
-          <p:cNvPr id="574387495" name="Slide Number Placeholder 3"/>
+          <p:cNvPr id="1100602339" name="Slide Number Placeholder 3"/>
           <p:cNvSpPr>
             <a:spLocks noGrp="1"/>
           </p:cNvSpPr>
@@ -2017,7 +2017,7 @@
       </p:grpSpPr>
       <p:sp>
         <p:nvSpPr>
-          <p:cNvPr id="1956623371" name="Text 0"/>
+          <p:cNvPr id="1001962249" name="Text 0"/>
           <p:cNvSpPr/>
           <p:nvPr/>
         </p:nvSpPr>
@@ -2060,7 +2060,7 @@
       </p:sp>
       <p:sp>
         <p:nvSpPr>
-          <p:cNvPr id="1994528870" name="Text 1"/>
+          <p:cNvPr id="1320302857" name="Text 1"/>
           <p:cNvSpPr/>
           <p:nvPr/>
         </p:nvSpPr>
@@ -2103,7 +2103,7 @@
       </p:sp>
       <p:sp>
         <p:nvSpPr>
-          <p:cNvPr id="1182426010" name="Text 2"/>
+          <p:cNvPr id="1493516000" name="Text 2"/>
           <p:cNvSpPr/>
           <p:nvPr/>
         </p:nvSpPr>
@@ -2186,7 +2186,7 @@
       </p:grpSpPr>
       <p:sp>
         <p:nvSpPr>
-          <p:cNvPr id="988229504" name="Text 0"/>
+          <p:cNvPr id="454054139" name="Text 0"/>
           <p:cNvSpPr/>
           <p:nvPr/>
         </p:nvSpPr>
@@ -2229,7 +2229,7 @@
       </p:sp>
       <p:sp>
         <p:nvSpPr>
-          <p:cNvPr id="1976115325" name="Text 1"/>
+          <p:cNvPr id="876481426" name="Text 1"/>
           <p:cNvSpPr/>
           <p:nvPr/>
         </p:nvSpPr>
@@ -2437,7 +2437,7 @@
       </p:grpSpPr>
       <p:sp>
         <p:nvSpPr>
-          <p:cNvPr id="1472599906" name="Text 0"/>
+          <p:cNvPr id="1395987191" name="Text 0"/>
           <p:cNvSpPr/>
           <p:nvPr/>
         </p:nvSpPr>
@@ -2480,7 +2480,7 @@
       </p:sp>
       <p:sp>
         <p:nvSpPr>
-          <p:cNvPr id="365740334" name="Text 1"/>
+          <p:cNvPr id="958653793" name="Text 1"/>
           <p:cNvSpPr/>
           <p:nvPr/>
         </p:nvSpPr>
@@ -3054,7 +3054,7 @@
       </p:grpSpPr>
       <p:sp>
         <p:nvSpPr>
-          <p:cNvPr id="1942540844" name="Text 0"/>
+          <p:cNvPr id="2100559582" name="Text 0"/>
           <p:cNvSpPr/>
           <p:nvPr/>
         </p:nvSpPr>
@@ -3097,7 +3097,7 @@
       </p:sp>
       <p:sp>
         <p:nvSpPr>
-          <p:cNvPr id="1787482091" name="Text 1"/>
+          <p:cNvPr id="623740741" name="Text 1"/>
           <p:cNvSpPr/>
           <p:nvPr/>
         </p:nvSpPr>
@@ -3205,7 +3205,7 @@
       </p:sp>
       <p:graphicFrame>
         <p:nvGraphicFramePr>
-          <p:cNvPr id="575238305" name=""/>
+          <p:cNvPr id="1065815111" name=""/>
           <p:cNvGraphicFramePr>
             <a:graphicFrameLocks xmlns:a="http://schemas.openxmlformats.org/drawingml/2006/main"/>
           </p:cNvGraphicFramePr>
@@ -6168,7 +6168,7 @@
       </p:grpSpPr>
       <p:sp>
         <p:nvSpPr>
-          <p:cNvPr id="1537731743" name="Text 0"/>
+          <p:cNvPr id="1730811465" name="Text 0"/>
           <p:cNvSpPr/>
           <p:nvPr/>
         </p:nvSpPr>
@@ -6215,7 +6215,7 @@
       </p:sp>
       <p:sp>
         <p:nvSpPr>
-          <p:cNvPr id="717088231" name="Text 1"/>
+          <p:cNvPr id="1427444617" name="Text 1"/>
           <p:cNvSpPr/>
           <p:nvPr/>
         </p:nvSpPr>
@@ -7011,7 +7011,7 @@
       </p:grpSpPr>
       <p:sp>
         <p:nvSpPr>
-          <p:cNvPr id="1569072146" name="Text 0"/>
+          <p:cNvPr id="742401559" name="Text 0"/>
           <p:cNvSpPr/>
           <p:nvPr/>
         </p:nvSpPr>
@@ -7058,7 +7058,7 @@
       </p:sp>
       <p:sp>
         <p:nvSpPr>
-          <p:cNvPr id="220742209" name="Text 1"/>
+          <p:cNvPr id="1239946318" name="Text 1"/>
           <p:cNvSpPr/>
           <p:nvPr/>
         </p:nvSpPr>
@@ -7824,13 +7824,13 @@
       </p:grpSpPr>
       <p:sp>
         <p:nvSpPr>
-          <p:cNvPr id="1365331173" name="Text 0"/>
+          <p:cNvPr id="2013466667" name="Text 0"/>
           <p:cNvSpPr/>
           <p:nvPr/>
         </p:nvSpPr>
         <p:spPr bwMode="auto">
           <a:xfrm>
-            <a:off x="609599" y="506067"/>
+            <a:off x="312768" y="38162"/>
             <a:ext cx="8083296" cy="411460"/>
           </a:xfrm>
           <a:prstGeom prst="rect">
@@ -7867,14 +7867,14 @@
       </p:sp>
       <p:sp>
         <p:nvSpPr>
-          <p:cNvPr id="451110093" name="Text 1"/>
+          <p:cNvPr id="792523162" name="Text 1"/>
           <p:cNvSpPr/>
           <p:nvPr/>
         </p:nvSpPr>
         <p:spPr bwMode="auto">
           <a:xfrm flipH="0" flipV="0">
-            <a:off x="609599" y="971578"/>
-            <a:ext cx="7619999" cy="1413812"/>
+            <a:off x="299154" y="506679"/>
+            <a:ext cx="7619998" cy="1130821"/>
           </a:xfrm>
           <a:prstGeom prst="rect">
             <a:avLst/>
@@ -7888,7 +7888,7 @@
           <a:p>
             <a:pPr marL="342900" indent="-342900">
               <a:lnSpc>
-                <a:spcPts val="2430"/>
+                <a:spcPct val="150000"/>
               </a:lnSpc>
               <a:buSzPct val="100000"/>
               <a:buChar char="•"/>
@@ -7947,7 +7947,29 @@
                 <a:ea typeface="Arial"/>
                 <a:cs typeface="Arial"/>
               </a:rPr>
-              <a:t>(Art.68, c.6 del TUIR)</a:t>
+              <a:t>(</a:t>
+            </a:r>
+            <a:r>
+              <a:rPr sz="1100" b="1" i="1" u="none">
+                <a:solidFill>
+                  <a:schemeClr val="bg1"/>
+                </a:solidFill>
+                <a:latin typeface="Arial"/>
+                <a:ea typeface="Arial"/>
+                <a:cs typeface="Arial"/>
+              </a:rPr>
+              <a:t>Art.68, c.6 del TUIR</a:t>
+            </a:r>
+            <a:r>
+              <a:rPr sz="1100" b="0" i="1" u="none">
+                <a:solidFill>
+                  <a:schemeClr val="bg1"/>
+                </a:solidFill>
+                <a:latin typeface="Arial"/>
+                <a:ea typeface="Arial"/>
+                <a:cs typeface="Arial"/>
+              </a:rPr>
+              <a:t>)</a:t>
             </a:r>
             <a:endParaRPr sz="1100">
               <a:solidFill>
@@ -7971,8 +7993,8 @@
               <a:rPr lang="en-US" sz="1600">
                 <a:solidFill>
                   <a:schemeClr val="accent4">
-                    <a:lumMod val="20000"/>
-                    <a:lumOff val="80000"/>
+                    <a:lumMod val="40000"/>
+                    <a:lumOff val="60000"/>
                   </a:schemeClr>
                 </a:solidFill>
                 <a:latin typeface="Arial"/>
@@ -7994,13 +8016,13 @@
       </p:sp>
       <p:sp>
         <p:nvSpPr>
-          <p:cNvPr id="2035573922" name="Text 0"/>
+          <p:cNvPr id="2001756382" name="Text 0"/>
           <p:cNvSpPr/>
           <p:nvPr/>
         </p:nvSpPr>
         <p:spPr bwMode="auto">
           <a:xfrm flipH="0" flipV="0">
-            <a:off x="682750" y="2385390"/>
+            <a:off x="312768" y="1637501"/>
             <a:ext cx="8096910" cy="411459"/>
           </a:xfrm>
           <a:prstGeom prst="rect">
@@ -8037,14 +8059,14 @@
       </p:sp>
       <p:sp>
         <p:nvSpPr>
-          <p:cNvPr id="1870293022" name="Text 1"/>
+          <p:cNvPr id="1762596259" name="Text 1"/>
           <p:cNvSpPr/>
           <p:nvPr/>
         </p:nvSpPr>
         <p:spPr bwMode="auto">
           <a:xfrm flipH="0" flipV="0">
-            <a:off x="658976" y="2878050"/>
-            <a:ext cx="7984543" cy="2036297"/>
+            <a:off x="177111" y="2161848"/>
+            <a:ext cx="8854722" cy="2805261"/>
           </a:xfrm>
           <a:prstGeom prst="rect">
             <a:avLst/>
@@ -8056,16 +8078,16 @@
           <a:bodyPr wrap="square" lIns="0" tIns="0" rIns="0" bIns="0" rtlCol="0" anchor="t"/>
           <a:lstStyle/>
           <a:p>
-            <a:pPr marL="342900" indent="-342900">
+            <a:pPr marL="206778" indent="-206778">
               <a:lnSpc>
-                <a:spcPts val="2429"/>
+                <a:spcPct val="150000"/>
               </a:lnSpc>
-              <a:buSzPct val="100000"/>
+              <a:buFont typeface="Arial"/>
               <a:buChar char="•"/>
               <a:defRPr/>
             </a:pPr>
             <a:r>
-              <a:rPr sz="1200" b="0" i="1" u="none">
+              <a:rPr sz="1100" b="0" i="1" u="none">
                 <a:solidFill>
                   <a:schemeClr val="bg2"/>
                 </a:solidFill>
@@ -8076,7 +8098,7 @@
               <a:t>Le plusvalenze di cui alla lettera c-sexies) del comma 1 dell’articolo 67 sono costituite dalla differenza tra il corrispettivo percepito ovvero il valore normale delle cripto-attività permutate e il costo o il valore di acquisto.</a:t>
             </a:r>
             <a:r>
-              <a:rPr sz="1200" b="0" i="1" u="none">
+              <a:rPr sz="1100" b="0" i="1" u="none">
                 <a:solidFill>
                   <a:schemeClr val="bg1"/>
                 </a:solidFill>
@@ -8086,7 +8108,83 @@
               </a:rPr>
               <a:t> </a:t>
             </a:r>
-            <a:endParaRPr lang="en-US" sz="1350">
+            <a:br>
+              <a:rPr sz="1100" b="0" i="1" u="none">
+                <a:solidFill>
+                  <a:schemeClr val="bg1"/>
+                </a:solidFill>
+                <a:latin typeface="Arial"/>
+                <a:ea typeface="Arial"/>
+                <a:cs typeface="Arial"/>
+              </a:rPr>
+            </a:br>
+            <a:r>
+              <a:rPr lang="it-IT" sz="1100">
+                <a:solidFill>
+                  <a:schemeClr val="bg1"/>
+                </a:solidFill>
+                <a:latin typeface="Arial"/>
+                <a:ea typeface="Arial"/>
+                <a:cs typeface="Arial"/>
+              </a:rPr>
+              <a:t>Inoltre aggiungono: </a:t>
+            </a:r>
+            <a:r>
+              <a:rPr sz="1100" b="0" i="1" u="none">
+                <a:solidFill>
+                  <a:schemeClr val="bg2"/>
+                </a:solidFill>
+                <a:latin typeface="Arial"/>
+                <a:ea typeface="Arial"/>
+                <a:cs typeface="Arial"/>
+              </a:rPr>
+              <a:t>I proventi derivanti dalla detenzione di cripto-attività percepiti  nel periodo di imposta sono assoggettati a tassazione senza alcuna  deduzione</a:t>
+            </a:r>
+            <a:r>
+              <a:rPr lang="it-IT" sz="1100" b="0" i="1" u="none">
+                <a:solidFill>
+                  <a:schemeClr val="bg2"/>
+                </a:solidFill>
+                <a:latin typeface="Times New Roman"/>
+                <a:ea typeface="Times New Roman"/>
+                <a:cs typeface="Times New Roman"/>
+              </a:rPr>
+              <a:t>. </a:t>
+            </a:r>
+            <a:r>
+              <a:rPr lang="en-US" sz="1100" b="0" i="1" u="none" strike="noStrike" cap="none" spc="0">
+                <a:solidFill>
+                  <a:schemeClr val="bg1"/>
+                </a:solidFill>
+                <a:latin typeface="Arial"/>
+                <a:ea typeface="Arial"/>
+                <a:cs typeface="Arial"/>
+              </a:rPr>
+              <a:t>(</a:t>
+            </a:r>
+            <a:r>
+              <a:rPr lang="en-US" sz="1100" b="1" i="1" u="none" strike="noStrike" cap="none" spc="0">
+                <a:solidFill>
+                  <a:schemeClr val="bg1"/>
+                </a:solidFill>
+                <a:latin typeface="Arial"/>
+                <a:ea typeface="Arial"/>
+                <a:cs typeface="Arial"/>
+              </a:rPr>
+              <a:t>Art. 68, c.9-bis del TUIR</a:t>
+            </a:r>
+            <a:r>
+              <a:rPr lang="en-US" sz="1100" b="0" i="1" u="none" strike="noStrike" cap="none" spc="0">
+                <a:solidFill>
+                  <a:schemeClr val="bg1"/>
+                </a:solidFill>
+                <a:latin typeface="Arial"/>
+                <a:ea typeface="Arial"/>
+                <a:cs typeface="Arial"/>
+              </a:rPr>
+              <a:t> –&gt; Introdotto con legge di bilancio 2023)</a:t>
+            </a:r>
+            <a:endParaRPr sz="1100" b="0" i="1" u="none">
               <a:solidFill>
                 <a:schemeClr val="bg1"/>
               </a:solidFill>
@@ -8096,46 +8194,13 @@
             </a:endParaRPr>
           </a:p>
           <a:p>
-            <a:pPr lvl="1">
+            <a:pPr>
               <a:lnSpc>
-                <a:spcPts val="2428"/>
+                <a:spcPct val="150000"/>
               </a:lnSpc>
               <a:defRPr/>
             </a:pPr>
-            <a:r>
-              <a:rPr lang="it-IT" sz="1350">
-                <a:solidFill>
-                  <a:schemeClr val="bg1"/>
-                </a:solidFill>
-                <a:latin typeface="Arial"/>
-                <a:ea typeface="Arial"/>
-                <a:cs typeface="Arial"/>
-              </a:rPr>
-              <a:t>Inoltre aggiungono: </a:t>
-            </a:r>
-            <a:r>
-              <a:rPr sz="1200" b="0" i="1" u="none">
-                <a:solidFill>
-                  <a:schemeClr val="bg2"/>
-                </a:solidFill>
-                <a:latin typeface="Arial"/>
-                <a:ea typeface="Arial"/>
-                <a:cs typeface="Arial"/>
-              </a:rPr>
-              <a:t>I proventi derivanti dalla detenzione di cripto-attività percepiti  nel periodo di imposta sono assoggettati a tassazione senza alcuna  deduzione</a:t>
-            </a:r>
-            <a:r>
-              <a:rPr lang="it-IT" sz="1200" b="0" i="1" u="none">
-                <a:solidFill>
-                  <a:schemeClr val="bg2"/>
-                </a:solidFill>
-                <a:latin typeface="Times New Roman"/>
-                <a:ea typeface="Times New Roman"/>
-                <a:cs typeface="Times New Roman"/>
-              </a:rPr>
-              <a:t>.</a:t>
-            </a:r>
-            <a:endParaRPr lang="en-US" sz="1350">
+            <a:endParaRPr sz="1100" b="0" i="1" u="none">
               <a:solidFill>
                 <a:schemeClr val="bg1"/>
               </a:solidFill>
@@ -8145,14 +8210,16 @@
             </a:endParaRPr>
           </a:p>
           <a:p>
-            <a:pPr lvl="1">
+            <a:pPr marL="206778" indent="-206778">
               <a:lnSpc>
-                <a:spcPts val="2428"/>
+                <a:spcPct val="150000"/>
               </a:lnSpc>
-              <a:defRPr/>
-            </a:pPr>
-            <a:r>
-              <a:rPr lang="en-US" sz="1350" b="0" i="1" u="none" strike="noStrike" cap="none" spc="0">
+              <a:buFont typeface="Arial"/>
+              <a:buChar char="•"/>
+              <a:defRPr/>
+            </a:pPr>
+            <a:r>
+              <a:rPr lang="en-US" sz="1100" b="0" i="1" u="none" strike="noStrike" cap="none" spc="0">
                 <a:solidFill>
                   <a:schemeClr val="bg1"/>
                 </a:solidFill>
@@ -8160,9 +8227,64 @@
                 <a:ea typeface="Arial"/>
                 <a:cs typeface="Arial"/>
               </a:rPr>
-              <a:t>(Art. 68, c.9-bis del TUIR –&gt; Introdotto con legge di bilancio 2023)</a:t>
-            </a:r>
-            <a:endParaRPr lang="en-US" sz="1350">
+              <a:t>Al riguardo, si evidenzia che, a differenza di quanto previsto per le attività finanziarie dal comma 6 dell’articolo 68 del Tuir, secondo cui il costo o valore di acquisto è aumentato di ogni altro costo inerente (bolli, commissioni, imposte, con esclusione degli oneri finanziari), il comma 9-bis non consente di tener conto nella determinazione dei redditi diversi derivanti dalle cripto-attività dei costi inerenti l’acquisto e la cessione.</a:t>
+            </a:r>
+            <a:r>
+              <a:rPr lang="en-US" sz="1100" b="0" i="1" u="none" strike="noStrike" cap="none" spc="0">
+                <a:solidFill>
+                  <a:schemeClr val="bg1"/>
+                </a:solidFill>
+                <a:latin typeface="Arial"/>
+                <a:ea typeface="Arial"/>
+                <a:cs typeface="Arial"/>
+              </a:rPr>
+              <a:t> </a:t>
+            </a:r>
+            <a:r>
+              <a:rPr lang="en-US" sz="1100" b="0" i="1" u="none" strike="noStrike" cap="none" spc="0">
+                <a:solidFill>
+                  <a:schemeClr val="bg1"/>
+                </a:solidFill>
+                <a:latin typeface="Arial"/>
+                <a:ea typeface="Arial"/>
+                <a:cs typeface="Arial"/>
+              </a:rPr>
+              <a:t>(</a:t>
+            </a:r>
+            <a:r>
+              <a:rPr lang="en-US" sz="1100" b="1" i="1" u="none" strike="noStrike" cap="none" spc="0">
+                <a:solidFill>
+                  <a:schemeClr val="bg1"/>
+                </a:solidFill>
+                <a:latin typeface="Arial"/>
+                <a:ea typeface="Arial"/>
+                <a:cs typeface="Arial"/>
+              </a:rPr>
+              <a:t>Circolare 30/E Agenzia delle Entrate</a:t>
+            </a:r>
+            <a:r>
+              <a:rPr lang="en-US" sz="1100" b="0" i="1" u="none" strike="noStrike" cap="none" spc="0">
+                <a:solidFill>
+                  <a:schemeClr val="bg1"/>
+                </a:solidFill>
+                <a:latin typeface="Arial"/>
+                <a:ea typeface="Arial"/>
+                <a:cs typeface="Arial"/>
+              </a:rPr>
+              <a:t> 27/10/23</a:t>
+            </a:r>
+            <a:r>
+              <a:rPr lang="en-US" sz="1100" b="0" i="1" u="none" strike="noStrike" cap="none" spc="0">
+                <a:solidFill>
+                  <a:schemeClr val="bg1"/>
+                </a:solidFill>
+                <a:latin typeface="Arial"/>
+                <a:ea typeface="Arial"/>
+                <a:cs typeface="Arial"/>
+              </a:rPr>
+              <a:t>)</a:t>
+            </a:r>
+            <a:endParaRPr lang="en-US" sz="1200" b="0" i="1" u="none" strike="noStrike" cap="none" spc="0">
               <a:solidFill>
                 <a:schemeClr val="bg1"/>
               </a:solidFill>
@@ -8184,8 +8306,8 @@
               <a:rPr lang="en-US" sz="1600">
                 <a:solidFill>
                   <a:schemeClr val="accent4">
-                    <a:lumMod val="20000"/>
-                    <a:lumOff val="80000"/>
+                    <a:lumMod val="40000"/>
+                    <a:lumOff val="60000"/>
                   </a:schemeClr>
                 </a:solidFill>
                 <a:latin typeface="Arial"/>
@@ -8256,7 +8378,7 @@
       </p:grpSpPr>
       <p:sp>
         <p:nvSpPr>
-          <p:cNvPr id="2082493107" name="Text 0"/>
+          <p:cNvPr id="1045585105" name="Text 0"/>
           <p:cNvSpPr/>
           <p:nvPr/>
         </p:nvSpPr>
@@ -8296,7 +8418,7 @@
       </p:sp>
       <p:sp>
         <p:nvSpPr>
-          <p:cNvPr id="2029690768" name="Text 1"/>
+          <p:cNvPr id="767707091" name="Text 1"/>
           <p:cNvSpPr/>
           <p:nvPr/>
         </p:nvSpPr>
@@ -8339,7 +8461,7 @@
       </p:sp>
       <p:sp>
         <p:nvSpPr>
-          <p:cNvPr id="1195969014" name="Text 3"/>
+          <p:cNvPr id="245041975" name="Text 3"/>
           <p:cNvSpPr/>
           <p:nvPr/>
         </p:nvSpPr>
@@ -9444,7 +9566,7 @@
       </p:grpSpPr>
       <p:sp>
         <p:nvSpPr>
-          <p:cNvPr id="1209436882" name="Text 1"/>
+          <p:cNvPr id="1625502883" name="Text 1"/>
           <p:cNvSpPr/>
           <p:nvPr/>
         </p:nvSpPr>
@@ -9487,7 +9609,7 @@
       </p:sp>
       <p:sp>
         <p:nvSpPr>
-          <p:cNvPr id="286120685" name="Text 2"/>
+          <p:cNvPr id="1050322940" name="Text 2"/>
           <p:cNvSpPr/>
           <p:nvPr/>
         </p:nvSpPr>
@@ -9540,7 +9662,7 @@
       </p:sp>
       <p:sp>
         <p:nvSpPr>
-          <p:cNvPr id="1694119709" name="Text 3"/>
+          <p:cNvPr id="2129712738" name="Text 3"/>
           <p:cNvSpPr/>
           <p:nvPr/>
         </p:nvSpPr>
@@ -9833,7 +9955,7 @@
       </p:grpSpPr>
       <p:sp>
         <p:nvSpPr>
-          <p:cNvPr id="864502644" name="Text 1"/>
+          <p:cNvPr id="1061527609" name="Text 1"/>
           <p:cNvSpPr/>
           <p:nvPr/>
         </p:nvSpPr>
@@ -9876,7 +9998,7 @@
       </p:sp>
       <p:sp>
         <p:nvSpPr>
-          <p:cNvPr id="57490102" name="Text 3"/>
+          <p:cNvPr id="844569929" name="Text 3"/>
           <p:cNvSpPr/>
           <p:nvPr/>
         </p:nvSpPr>
@@ -10484,7 +10606,7 @@
       </p:grpSpPr>
       <p:sp>
         <p:nvSpPr>
-          <p:cNvPr id="1130728202" name="Text 1"/>
+          <p:cNvPr id="1993218358" name="Text 1"/>
           <p:cNvSpPr/>
           <p:nvPr/>
         </p:nvSpPr>
@@ -10527,7 +10649,7 @@
       </p:sp>
       <p:sp>
         <p:nvSpPr>
-          <p:cNvPr id="198678623" name="Text 3"/>
+          <p:cNvPr id="413721000" name="Text 3"/>
           <p:cNvSpPr/>
           <p:nvPr/>
         </p:nvSpPr>
@@ -11051,7 +11173,7 @@
       </p:grpSpPr>
       <p:sp>
         <p:nvSpPr>
-          <p:cNvPr id="1409451478" name="Text 1"/>
+          <p:cNvPr id="1969669209" name="Text 1"/>
           <p:cNvSpPr/>
           <p:nvPr/>
         </p:nvSpPr>
@@ -11094,7 +11216,7 @@
       </p:sp>
       <p:sp>
         <p:nvSpPr>
-          <p:cNvPr id="2018475077" name="Text 3"/>
+          <p:cNvPr id="1405174217" name="Text 3"/>
           <p:cNvSpPr/>
           <p:nvPr/>
         </p:nvSpPr>
@@ -11597,7 +11719,7 @@
       </p:grpSpPr>
       <p:sp>
         <p:nvSpPr>
-          <p:cNvPr id="479935957" name="Text 0"/>
+          <p:cNvPr id="2143740867" name="Text 0"/>
           <p:cNvSpPr/>
           <p:nvPr/>
         </p:nvSpPr>
@@ -11640,7 +11762,7 @@
       </p:sp>
       <p:sp>
         <p:nvSpPr>
-          <p:cNvPr id="966709026" name="Text 1"/>
+          <p:cNvPr id="804210974" name="Text 1"/>
           <p:cNvSpPr/>
           <p:nvPr/>
         </p:nvSpPr>
@@ -11947,7 +12069,7 @@
       </p:grpSpPr>
       <p:sp>
         <p:nvSpPr>
-          <p:cNvPr id="838879336" name="Text 0"/>
+          <p:cNvPr id="1612377277" name="Text 0"/>
           <p:cNvSpPr/>
           <p:nvPr/>
         </p:nvSpPr>
@@ -11990,7 +12112,7 @@
       </p:sp>
       <p:sp>
         <p:nvSpPr>
-          <p:cNvPr id="88133839" name="Text 1"/>
+          <p:cNvPr id="1462746396" name="Text 1"/>
           <p:cNvSpPr/>
           <p:nvPr/>
         </p:nvSpPr>
@@ -12104,7 +12226,7 @@
       </p:sp>
       <p:graphicFrame>
         <p:nvGraphicFramePr>
-          <p:cNvPr id="693731435" name=""/>
+          <p:cNvPr id="1692543958" name=""/>
           <p:cNvGraphicFramePr>
             <a:graphicFrameLocks xmlns:a="http://schemas.openxmlformats.org/drawingml/2006/main"/>
           </p:cNvGraphicFramePr>
